--- a/slides/8 Neural Networks and Word Embeddings.pptx
+++ b/slides/8 Neural Networks and Word Embeddings.pptx
@@ -5,7 +5,7 @@
     <p:sldMasterId id="2147483660" r:id="rId1"/>
   </p:sldMasterIdLst>
   <p:notesMasterIdLst>
-    <p:notesMasterId r:id="rId61"/>
+    <p:notesMasterId r:id="rId66"/>
   </p:notesMasterIdLst>
   <p:sldIdLst>
     <p:sldId id="292" r:id="rId2"/>
@@ -39,34 +39,39 @@
     <p:sldId id="305" r:id="rId30"/>
     <p:sldId id="318" r:id="rId31"/>
     <p:sldId id="262" r:id="rId32"/>
-    <p:sldId id="306" r:id="rId33"/>
-    <p:sldId id="307" r:id="rId34"/>
-    <p:sldId id="309" r:id="rId35"/>
-    <p:sldId id="308" r:id="rId36"/>
-    <p:sldId id="276" r:id="rId37"/>
-    <p:sldId id="277" r:id="rId38"/>
-    <p:sldId id="283" r:id="rId39"/>
-    <p:sldId id="284" r:id="rId40"/>
-    <p:sldId id="285" r:id="rId41"/>
-    <p:sldId id="286" r:id="rId42"/>
-    <p:sldId id="287" r:id="rId43"/>
-    <p:sldId id="288" r:id="rId44"/>
-    <p:sldId id="289" r:id="rId45"/>
-    <p:sldId id="281" r:id="rId46"/>
-    <p:sldId id="263" r:id="rId47"/>
-    <p:sldId id="291" r:id="rId48"/>
-    <p:sldId id="265" r:id="rId49"/>
-    <p:sldId id="266" r:id="rId50"/>
-    <p:sldId id="264" r:id="rId51"/>
-    <p:sldId id="267" r:id="rId52"/>
-    <p:sldId id="268" r:id="rId53"/>
-    <p:sldId id="269" r:id="rId54"/>
-    <p:sldId id="270" r:id="rId55"/>
-    <p:sldId id="271" r:id="rId56"/>
-    <p:sldId id="272" r:id="rId57"/>
-    <p:sldId id="273" r:id="rId58"/>
-    <p:sldId id="274" r:id="rId59"/>
-    <p:sldId id="275" r:id="rId60"/>
+    <p:sldId id="320" r:id="rId33"/>
+    <p:sldId id="306" r:id="rId34"/>
+    <p:sldId id="307" r:id="rId35"/>
+    <p:sldId id="309" r:id="rId36"/>
+    <p:sldId id="308" r:id="rId37"/>
+    <p:sldId id="276" r:id="rId38"/>
+    <p:sldId id="277" r:id="rId39"/>
+    <p:sldId id="283" r:id="rId40"/>
+    <p:sldId id="284" r:id="rId41"/>
+    <p:sldId id="285" r:id="rId42"/>
+    <p:sldId id="286" r:id="rId43"/>
+    <p:sldId id="287" r:id="rId44"/>
+    <p:sldId id="288" r:id="rId45"/>
+    <p:sldId id="289" r:id="rId46"/>
+    <p:sldId id="321" r:id="rId47"/>
+    <p:sldId id="322" r:id="rId48"/>
+    <p:sldId id="323" r:id="rId49"/>
+    <p:sldId id="324" r:id="rId50"/>
+    <p:sldId id="281" r:id="rId51"/>
+    <p:sldId id="263" r:id="rId52"/>
+    <p:sldId id="291" r:id="rId53"/>
+    <p:sldId id="265" r:id="rId54"/>
+    <p:sldId id="266" r:id="rId55"/>
+    <p:sldId id="264" r:id="rId56"/>
+    <p:sldId id="267" r:id="rId57"/>
+    <p:sldId id="268" r:id="rId58"/>
+    <p:sldId id="269" r:id="rId59"/>
+    <p:sldId id="270" r:id="rId60"/>
+    <p:sldId id="271" r:id="rId61"/>
+    <p:sldId id="272" r:id="rId62"/>
+    <p:sldId id="273" r:id="rId63"/>
+    <p:sldId id="274" r:id="rId64"/>
+    <p:sldId id="275" r:id="rId65"/>
   </p:sldIdLst>
   <p:sldSz cx="12192000" cy="6858000"/>
   <p:notesSz cx="6858000" cy="9144000"/>
@@ -176,6 +181,7 @@
 <file path=ppt/revisionInfo.xml><?xml version="1.0" encoding="utf-8"?>
 <p1510:revInfo xmlns:a="http://schemas.openxmlformats.org/drawingml/2006/main" xmlns:r="http://schemas.openxmlformats.org/officeDocument/2006/relationships" xmlns:p1510="http://schemas.microsoft.com/office/powerpoint/2015/10/main">
   <p1510:revLst>
+    <p1510:client id="{02ABDD26-213E-5F43-9209-0160B7C03242}" v="6" dt="2026-02-23T17:59:29.711"/>
     <p1510:client id="{206F0180-55AE-2D45-B526-53EE1A7A9829}" v="7" dt="2026-02-23T05:26:57.991"/>
   </p1510:revLst>
 </p1510:revInfo>
@@ -753,7 +759,7 @@
   <pc:docChgLst>
     <pc:chgData name="Sebastian Vallejo Vera" userId="661f42ee-5565-49c4-8b1d-325f2d699b91" providerId="ADAL" clId="{8C1EFA1F-0339-5164-815E-AFC004A65A72}"/>
     <pc:docChg chg="undo custSel addSld delSld modSld sldOrd">
-      <pc:chgData name="Sebastian Vallejo Vera" userId="661f42ee-5565-49c4-8b1d-325f2d699b91" providerId="ADAL" clId="{8C1EFA1F-0339-5164-815E-AFC004A65A72}" dt="2026-02-09T17:55:54.624" v="2224" actId="20577"/>
+      <pc:chgData name="Sebastian Vallejo Vera" userId="661f42ee-5565-49c4-8b1d-325f2d699b91" providerId="ADAL" clId="{8C1EFA1F-0339-5164-815E-AFC004A65A72}" dt="2026-02-23T17:59:35.665" v="2413" actId="1076"/>
       <pc:docMkLst>
         <pc:docMk/>
       </pc:docMkLst>
@@ -1212,6 +1218,149 @@
           </ac:spMkLst>
         </pc:spChg>
       </pc:sldChg>
+      <pc:sldChg chg="modSp mod">
+        <pc:chgData name="Sebastian Vallejo Vera" userId="661f42ee-5565-49c4-8b1d-325f2d699b91" providerId="ADAL" clId="{8C1EFA1F-0339-5164-815E-AFC004A65A72}" dt="2026-02-23T16:11:46.151" v="2342" actId="20577"/>
+        <pc:sldMkLst>
+          <pc:docMk/>
+          <pc:sldMk cId="1477738954" sldId="306"/>
+        </pc:sldMkLst>
+        <pc:spChg chg="mod">
+          <ac:chgData name="Sebastian Vallejo Vera" userId="661f42ee-5565-49c4-8b1d-325f2d699b91" providerId="ADAL" clId="{8C1EFA1F-0339-5164-815E-AFC004A65A72}" dt="2026-02-23T16:11:46.151" v="2342" actId="20577"/>
+          <ac:spMkLst>
+            <pc:docMk/>
+            <pc:sldMk cId="1477738954" sldId="306"/>
+            <ac:spMk id="3" creationId="{396DB1BF-82A6-5D19-F5FE-E96016A8E663}"/>
+          </ac:spMkLst>
+        </pc:spChg>
+      </pc:sldChg>
+      <pc:sldChg chg="modSp mod">
+        <pc:chgData name="Sebastian Vallejo Vera" userId="661f42ee-5565-49c4-8b1d-325f2d699b91" providerId="ADAL" clId="{8C1EFA1F-0339-5164-815E-AFC004A65A72}" dt="2026-02-23T16:32:08.196" v="2385" actId="313"/>
+        <pc:sldMkLst>
+          <pc:docMk/>
+          <pc:sldMk cId="4139455046" sldId="308"/>
+        </pc:sldMkLst>
+        <pc:spChg chg="mod">
+          <ac:chgData name="Sebastian Vallejo Vera" userId="661f42ee-5565-49c4-8b1d-325f2d699b91" providerId="ADAL" clId="{8C1EFA1F-0339-5164-815E-AFC004A65A72}" dt="2026-02-23T16:32:08.196" v="2385" actId="313"/>
+          <ac:spMkLst>
+            <pc:docMk/>
+            <pc:sldMk cId="4139455046" sldId="308"/>
+            <ac:spMk id="3" creationId="{2F12923A-BFBA-7E5A-BEFD-F201B39E62C7}"/>
+          </ac:spMkLst>
+        </pc:spChg>
+      </pc:sldChg>
+      <pc:sldChg chg="modSp mod">
+        <pc:chgData name="Sebastian Vallejo Vera" userId="661f42ee-5565-49c4-8b1d-325f2d699b91" providerId="ADAL" clId="{8C1EFA1F-0339-5164-815E-AFC004A65A72}" dt="2026-02-23T16:31:57.553" v="2381" actId="20577"/>
+        <pc:sldMkLst>
+          <pc:docMk/>
+          <pc:sldMk cId="788568084" sldId="309"/>
+        </pc:sldMkLst>
+        <pc:spChg chg="mod">
+          <ac:chgData name="Sebastian Vallejo Vera" userId="661f42ee-5565-49c4-8b1d-325f2d699b91" providerId="ADAL" clId="{8C1EFA1F-0339-5164-815E-AFC004A65A72}" dt="2026-02-23T16:31:49.907" v="2361" actId="20577"/>
+          <ac:spMkLst>
+            <pc:docMk/>
+            <pc:sldMk cId="788568084" sldId="309"/>
+            <ac:spMk id="2" creationId="{91C896D7-5AB6-8CAA-879C-C997692F6C82}"/>
+          </ac:spMkLst>
+        </pc:spChg>
+        <pc:spChg chg="mod">
+          <ac:chgData name="Sebastian Vallejo Vera" userId="661f42ee-5565-49c4-8b1d-325f2d699b91" providerId="ADAL" clId="{8C1EFA1F-0339-5164-815E-AFC004A65A72}" dt="2026-02-23T16:31:57.553" v="2381" actId="20577"/>
+          <ac:spMkLst>
+            <pc:docMk/>
+            <pc:sldMk cId="788568084" sldId="309"/>
+            <ac:spMk id="3" creationId="{5FFDD610-42D3-8ACF-70AF-D9F6C6CBADD9}"/>
+          </ac:spMkLst>
+        </pc:spChg>
+      </pc:sldChg>
+      <pc:sldChg chg="new del">
+        <pc:chgData name="Sebastian Vallejo Vera" userId="661f42ee-5565-49c4-8b1d-325f2d699b91" providerId="ADAL" clId="{8C1EFA1F-0339-5164-815E-AFC004A65A72}" dt="2026-02-23T16:09:35.897" v="2227" actId="2696"/>
+        <pc:sldMkLst>
+          <pc:docMk/>
+          <pc:sldMk cId="1587452142" sldId="319"/>
+        </pc:sldMkLst>
+      </pc:sldChg>
+      <pc:sldChg chg="modSp new mod">
+        <pc:chgData name="Sebastian Vallejo Vera" userId="661f42ee-5565-49c4-8b1d-325f2d699b91" providerId="ADAL" clId="{8C1EFA1F-0339-5164-815E-AFC004A65A72}" dt="2026-02-23T16:11:40.824" v="2335" actId="20577"/>
+        <pc:sldMkLst>
+          <pc:docMk/>
+          <pc:sldMk cId="1892838349" sldId="320"/>
+        </pc:sldMkLst>
+        <pc:spChg chg="mod">
+          <ac:chgData name="Sebastian Vallejo Vera" userId="661f42ee-5565-49c4-8b1d-325f2d699b91" providerId="ADAL" clId="{8C1EFA1F-0339-5164-815E-AFC004A65A72}" dt="2026-02-23T16:11:40.824" v="2335" actId="20577"/>
+          <ac:spMkLst>
+            <pc:docMk/>
+            <pc:sldMk cId="1892838349" sldId="320"/>
+            <ac:spMk id="3" creationId="{212DFD4A-3B06-E315-5D14-D0F710680097}"/>
+          </ac:spMkLst>
+        </pc:spChg>
+      </pc:sldChg>
+      <pc:sldChg chg="addSp modSp new mod modClrScheme chgLayout">
+        <pc:chgData name="Sebastian Vallejo Vera" userId="661f42ee-5565-49c4-8b1d-325f2d699b91" providerId="ADAL" clId="{8C1EFA1F-0339-5164-815E-AFC004A65A72}" dt="2026-02-23T17:56:46.140" v="2399" actId="1076"/>
+        <pc:sldMkLst>
+          <pc:docMk/>
+          <pc:sldMk cId="4232520081" sldId="321"/>
+        </pc:sldMkLst>
+        <pc:spChg chg="add mod">
+          <ac:chgData name="Sebastian Vallejo Vera" userId="661f42ee-5565-49c4-8b1d-325f2d699b91" providerId="ADAL" clId="{8C1EFA1F-0339-5164-815E-AFC004A65A72}" dt="2026-02-23T17:56:36.383" v="2395" actId="20577"/>
+          <ac:spMkLst>
+            <pc:docMk/>
+            <pc:sldMk cId="4232520081" sldId="321"/>
+            <ac:spMk id="2" creationId="{EAC62A07-98CD-1460-3F0B-2D90B3D629D2}"/>
+          </ac:spMkLst>
+        </pc:spChg>
+        <pc:picChg chg="add mod">
+          <ac:chgData name="Sebastian Vallejo Vera" userId="661f42ee-5565-49c4-8b1d-325f2d699b91" providerId="ADAL" clId="{8C1EFA1F-0339-5164-815E-AFC004A65A72}" dt="2026-02-23T17:56:46.140" v="2399" actId="1076"/>
+          <ac:picMkLst>
+            <pc:docMk/>
+            <pc:sldMk cId="4232520081" sldId="321"/>
+            <ac:picMk id="3" creationId="{EF2DD4A4-08B5-CE0A-C863-0A771FAF7924}"/>
+          </ac:picMkLst>
+        </pc:picChg>
+      </pc:sldChg>
+      <pc:sldChg chg="addSp modSp new mod">
+        <pc:chgData name="Sebastian Vallejo Vera" userId="661f42ee-5565-49c4-8b1d-325f2d699b91" providerId="ADAL" clId="{8C1EFA1F-0339-5164-815E-AFC004A65A72}" dt="2026-02-23T17:57:59.643" v="2403" actId="1076"/>
+        <pc:sldMkLst>
+          <pc:docMk/>
+          <pc:sldMk cId="3668267504" sldId="322"/>
+        </pc:sldMkLst>
+        <pc:picChg chg="add mod">
+          <ac:chgData name="Sebastian Vallejo Vera" userId="661f42ee-5565-49c4-8b1d-325f2d699b91" providerId="ADAL" clId="{8C1EFA1F-0339-5164-815E-AFC004A65A72}" dt="2026-02-23T17:57:59.643" v="2403" actId="1076"/>
+          <ac:picMkLst>
+            <pc:docMk/>
+            <pc:sldMk cId="3668267504" sldId="322"/>
+            <ac:picMk id="3" creationId="{ACC48218-E4CE-5F97-5133-188BB78FEC24}"/>
+          </ac:picMkLst>
+        </pc:picChg>
+      </pc:sldChg>
+      <pc:sldChg chg="addSp modSp new mod">
+        <pc:chgData name="Sebastian Vallejo Vera" userId="661f42ee-5565-49c4-8b1d-325f2d699b91" providerId="ADAL" clId="{8C1EFA1F-0339-5164-815E-AFC004A65A72}" dt="2026-02-23T17:59:05.665" v="2408" actId="1076"/>
+        <pc:sldMkLst>
+          <pc:docMk/>
+          <pc:sldMk cId="1295579852" sldId="323"/>
+        </pc:sldMkLst>
+        <pc:picChg chg="add mod">
+          <ac:chgData name="Sebastian Vallejo Vera" userId="661f42ee-5565-49c4-8b1d-325f2d699b91" providerId="ADAL" clId="{8C1EFA1F-0339-5164-815E-AFC004A65A72}" dt="2026-02-23T17:59:05.665" v="2408" actId="1076"/>
+          <ac:picMkLst>
+            <pc:docMk/>
+            <pc:sldMk cId="1295579852" sldId="323"/>
+            <ac:picMk id="3" creationId="{612047C6-1E68-565A-8A9F-72103CA88430}"/>
+          </ac:picMkLst>
+        </pc:picChg>
+      </pc:sldChg>
+      <pc:sldChg chg="addSp modSp new mod">
+        <pc:chgData name="Sebastian Vallejo Vera" userId="661f42ee-5565-49c4-8b1d-325f2d699b91" providerId="ADAL" clId="{8C1EFA1F-0339-5164-815E-AFC004A65A72}" dt="2026-02-23T17:59:35.665" v="2413" actId="1076"/>
+        <pc:sldMkLst>
+          <pc:docMk/>
+          <pc:sldMk cId="4293299986" sldId="324"/>
+        </pc:sldMkLst>
+        <pc:picChg chg="add mod">
+          <ac:chgData name="Sebastian Vallejo Vera" userId="661f42ee-5565-49c4-8b1d-325f2d699b91" providerId="ADAL" clId="{8C1EFA1F-0339-5164-815E-AFC004A65A72}" dt="2026-02-23T17:59:35.665" v="2413" actId="1076"/>
+          <ac:picMkLst>
+            <pc:docMk/>
+            <pc:sldMk cId="4293299986" sldId="324"/>
+            <ac:picMk id="3" creationId="{512B4EF7-217C-A0D5-42B8-ED10DA4B521C}"/>
+          </ac:picMkLst>
+        </pc:picChg>
+      </pc:sldChg>
     </pc:docChg>
   </pc:docChgLst>
 </pc:chgInfo>
@@ -1692,7 +1841,7 @@
           <a:p>
             <a:fld id="{9E219153-B832-5B44-9A3A-9DFABD1DEE08}" type="datetimeFigureOut">
               <a:rPr lang="en-US" smtClean="0"/>
-              <a:t>2/20/26</a:t>
+              <a:t>2/23/26</a:t>
             </a:fld>
             <a:endParaRPr lang="en-US"/>
           </a:p>
@@ -3264,7 +3413,7 @@
           <a:p>
             <a:fld id="{6C4272A9-F656-144E-AF11-F0D5D42FDDCF}" type="datetimeFigureOut">
               <a:rPr lang="en-US" smtClean="0"/>
-              <a:t>2/20/26</a:t>
+              <a:t>2/23/26</a:t>
             </a:fld>
             <a:endParaRPr lang="en-US"/>
           </a:p>
@@ -3509,7 +3658,7 @@
           <a:p>
             <a:fld id="{6C4272A9-F656-144E-AF11-F0D5D42FDDCF}" type="datetimeFigureOut">
               <a:rPr lang="en-US" smtClean="0"/>
-              <a:t>2/20/26</a:t>
+              <a:t>2/23/26</a:t>
             </a:fld>
             <a:endParaRPr lang="en-US"/>
           </a:p>
@@ -3689,7 +3838,7 @@
           <a:p>
             <a:fld id="{6C4272A9-F656-144E-AF11-F0D5D42FDDCF}" type="datetimeFigureOut">
               <a:rPr lang="en-US" smtClean="0"/>
-              <a:t>2/20/26</a:t>
+              <a:t>2/23/26</a:t>
             </a:fld>
             <a:endParaRPr lang="en-US"/>
           </a:p>
@@ -3859,7 +4008,7 @@
           <a:p>
             <a:fld id="{6C4272A9-F656-144E-AF11-F0D5D42FDDCF}" type="datetimeFigureOut">
               <a:rPr lang="en-US" smtClean="0"/>
-              <a:t>2/20/26</a:t>
+              <a:t>2/23/26</a:t>
             </a:fld>
             <a:endParaRPr lang="en-US"/>
           </a:p>
@@ -4135,7 +4284,7 @@
           <a:p>
             <a:fld id="{6C4272A9-F656-144E-AF11-F0D5D42FDDCF}" type="datetimeFigureOut">
               <a:rPr lang="en-US" smtClean="0"/>
-              <a:t>2/20/26</a:t>
+              <a:t>2/23/26</a:t>
             </a:fld>
             <a:endParaRPr lang="en-US"/>
           </a:p>
@@ -5350,7 +5499,7 @@
           <a:p>
             <a:fld id="{6C4272A9-F656-144E-AF11-F0D5D42FDDCF}" type="datetimeFigureOut">
               <a:rPr lang="en-US" smtClean="0"/>
-              <a:t>2/20/26</a:t>
+              <a:t>2/23/26</a:t>
             </a:fld>
             <a:endParaRPr lang="en-US"/>
           </a:p>
@@ -5740,7 +5889,7 @@
           <a:p>
             <a:fld id="{6C4272A9-F656-144E-AF11-F0D5D42FDDCF}" type="datetimeFigureOut">
               <a:rPr lang="en-US" smtClean="0"/>
-              <a:t>2/20/26</a:t>
+              <a:t>2/23/26</a:t>
             </a:fld>
             <a:endParaRPr lang="en-US"/>
           </a:p>
@@ -5863,7 +6012,7 @@
           <a:p>
             <a:fld id="{6C4272A9-F656-144E-AF11-F0D5D42FDDCF}" type="datetimeFigureOut">
               <a:rPr lang="en-US" smtClean="0"/>
-              <a:t>2/20/26</a:t>
+              <a:t>2/23/26</a:t>
             </a:fld>
             <a:endParaRPr lang="en-US"/>
           </a:p>
@@ -5958,7 +6107,7 @@
           <a:p>
             <a:fld id="{6C4272A9-F656-144E-AF11-F0D5D42FDDCF}" type="datetimeFigureOut">
               <a:rPr lang="en-US" smtClean="0"/>
-              <a:t>2/20/26</a:t>
+              <a:t>2/23/26</a:t>
             </a:fld>
             <a:endParaRPr lang="en-US"/>
           </a:p>
@@ -6721,7 +6870,7 @@
           <a:p>
             <a:fld id="{6C4272A9-F656-144E-AF11-F0D5D42FDDCF}" type="datetimeFigureOut">
               <a:rPr lang="en-US" smtClean="0"/>
-              <a:t>2/20/26</a:t>
+              <a:t>2/23/26</a:t>
             </a:fld>
             <a:endParaRPr lang="en-US"/>
           </a:p>
@@ -7561,7 +7710,7 @@
           <a:p>
             <a:fld id="{6C4272A9-F656-144E-AF11-F0D5D42FDDCF}" type="datetimeFigureOut">
               <a:rPr lang="en-US" smtClean="0"/>
-              <a:t>2/20/26</a:t>
+              <a:t>2/23/26</a:t>
             </a:fld>
             <a:endParaRPr lang="en-US"/>
           </a:p>
@@ -7788,7 +7937,7 @@
           <a:p>
             <a:fld id="{6C4272A9-F656-144E-AF11-F0D5D42FDDCF}" type="datetimeFigureOut">
               <a:rPr lang="en-US" smtClean="0"/>
-              <a:t>2/20/26</a:t>
+              <a:t>2/23/26</a:t>
             </a:fld>
             <a:endParaRPr lang="en-US"/>
           </a:p>
@@ -13570,6 +13719,109 @@
           <p:cNvPr id="2" name="Title 1">
             <a:extLst>
               <a:ext uri="{FF2B5EF4-FFF2-40B4-BE49-F238E27FC236}">
+                <a16:creationId xmlns:a16="http://schemas.microsoft.com/office/drawing/2014/main" id="{C84962F6-7FE1-8B9E-FAF7-1FB4A02C58C7}"/>
+              </a:ext>
+            </a:extLst>
+          </p:cNvPr>
+          <p:cNvSpPr>
+            <a:spLocks noGrp="1"/>
+          </p:cNvSpPr>
+          <p:nvPr>
+            <p:ph type="title"/>
+          </p:nvPr>
+        </p:nvSpPr>
+        <p:spPr/>
+        <p:txBody>
+          <a:bodyPr/>
+          <a:lstStyle/>
+          <a:p>
+            <a:endParaRPr lang="en-US"/>
+          </a:p>
+        </p:txBody>
+      </p:sp>
+      <p:sp>
+        <p:nvSpPr>
+          <p:cNvPr id="3" name="Content Placeholder 2">
+            <a:extLst>
+              <a:ext uri="{FF2B5EF4-FFF2-40B4-BE49-F238E27FC236}">
+                <a16:creationId xmlns:a16="http://schemas.microsoft.com/office/drawing/2014/main" id="{212DFD4A-3B06-E315-5D14-D0F710680097}"/>
+              </a:ext>
+            </a:extLst>
+          </p:cNvPr>
+          <p:cNvSpPr>
+            <a:spLocks noGrp="1"/>
+          </p:cNvSpPr>
+          <p:nvPr>
+            <p:ph idx="1"/>
+          </p:nvPr>
+        </p:nvSpPr>
+        <p:spPr/>
+        <p:txBody>
+          <a:bodyPr/>
+          <a:lstStyle/>
+          <a:p>
+            <a:r>
+              <a:rPr lang="en-US" dirty="0"/>
+              <a:t>First, let’s watch a little intro video</a:t>
+            </a:r>
+            <a:r>
+              <a:rPr lang="en-US" dirty="0">
+                <a:sym typeface="Wingdings" pitchFamily="2" charset="2"/>
+              </a:rPr>
+              <a:t> (YEY): </a:t>
+            </a:r>
+            <a:r>
+              <a:rPr lang="en-US" dirty="0">
+                <a:sym typeface="Wingdings" pitchFamily="2" charset="2"/>
+                <a:hlinkClick r:id="rId2"/>
+              </a:rPr>
+              <a:t>https://www.youtube.com/watch?v=aircAruvnKk</a:t>
+            </a:r>
+            <a:r>
+              <a:rPr lang="en-US" dirty="0">
+                <a:sym typeface="Wingdings" pitchFamily="2" charset="2"/>
+              </a:rPr>
+              <a:t> </a:t>
+            </a:r>
+            <a:endParaRPr lang="en-US" dirty="0"/>
+          </a:p>
+        </p:txBody>
+      </p:sp>
+    </p:spTree>
+    <p:extLst>
+      <p:ext uri="{BB962C8B-B14F-4D97-AF65-F5344CB8AC3E}">
+        <p14:creationId xmlns:p14="http://schemas.microsoft.com/office/powerpoint/2010/main" val="1892838349"/>
+      </p:ext>
+    </p:extLst>
+  </p:cSld>
+  <p:clrMapOvr>
+    <a:masterClrMapping/>
+  </p:clrMapOvr>
+</p:sld>
+</file>
+
+<file path=ppt/slides/slide33.xml><?xml version="1.0" encoding="utf-8"?>
+<p:sld xmlns:a="http://schemas.openxmlformats.org/drawingml/2006/main" xmlns:r="http://schemas.openxmlformats.org/officeDocument/2006/relationships" xmlns:p="http://schemas.openxmlformats.org/presentationml/2006/main">
+  <p:cSld>
+    <p:spTree>
+      <p:nvGrpSpPr>
+        <p:cNvPr id="1" name=""/>
+        <p:cNvGrpSpPr/>
+        <p:nvPr/>
+      </p:nvGrpSpPr>
+      <p:grpSpPr>
+        <a:xfrm>
+          <a:off x="0" y="0"/>
+          <a:ext cx="0" cy="0"/>
+          <a:chOff x="0" y="0"/>
+          <a:chExt cx="0" cy="0"/>
+        </a:xfrm>
+      </p:grpSpPr>
+      <p:sp>
+        <p:nvSpPr>
+          <p:cNvPr id="2" name="Title 1">
+            <a:extLst>
+              <a:ext uri="{FF2B5EF4-FFF2-40B4-BE49-F238E27FC236}">
                 <a16:creationId xmlns:a16="http://schemas.microsoft.com/office/drawing/2014/main" id="{6559040B-00B0-1630-A707-F10B385CB6FB}"/>
               </a:ext>
             </a:extLst>
@@ -13613,7 +13865,7 @@
           <a:p>
             <a:r>
               <a:rPr lang="en-US" dirty="0"/>
-              <a:t>Let’s go to our Week 8 code… </a:t>
+              <a:t>Now, let’s go to our Week 8 code… </a:t>
             </a:r>
           </a:p>
         </p:txBody>
@@ -13631,7 +13883,7 @@
 </p:sld>
 </file>
 
-<file path=ppt/slides/slide33.xml><?xml version="1.0" encoding="utf-8"?>
+<file path=ppt/slides/slide34.xml><?xml version="1.0" encoding="utf-8"?>
 <p:sld xmlns:a="http://schemas.openxmlformats.org/drawingml/2006/main" xmlns:r="http://schemas.openxmlformats.org/officeDocument/2006/relationships" xmlns:p="http://schemas.openxmlformats.org/presentationml/2006/main">
   <p:cSld>
     <p:spTree>
@@ -13714,7 +13966,7 @@
 </p:sld>
 </file>
 
-<file path=ppt/slides/slide34.xml><?xml version="1.0" encoding="utf-8"?>
+<file path=ppt/slides/slide35.xml><?xml version="1.0" encoding="utf-8"?>
 <p:sld xmlns:a="http://schemas.openxmlformats.org/drawingml/2006/main" xmlns:r="http://schemas.openxmlformats.org/officeDocument/2006/relationships" xmlns:p="http://schemas.openxmlformats.org/presentationml/2006/main">
   <p:cSld>
     <p:spTree>
@@ -13752,7 +14004,10 @@
           <a:bodyPr/>
           <a:lstStyle/>
           <a:p>
-            <a:endParaRPr lang="en-US" dirty="0"/>
+            <a:r>
+              <a:rPr lang="en-US" dirty="0"/>
+              <a:t>Word embeddings</a:t>
+            </a:r>
           </a:p>
         </p:txBody>
       </p:sp>
@@ -13777,7 +14032,18 @@
           <a:bodyPr/>
           <a:lstStyle/>
           <a:p>
-            <a:endParaRPr lang="en-US"/>
+            <a:r>
+              <a:rPr lang="en-US" dirty="0"/>
+              <a:t>(Now for </a:t>
+            </a:r>
+            <a:r>
+              <a:rPr lang="en-US" dirty="0" err="1"/>
+              <a:t>realsies</a:t>
+            </a:r>
+            <a:r>
+              <a:rPr lang="en-US" dirty="0"/>
+              <a:t>)</a:t>
+            </a:r>
           </a:p>
         </p:txBody>
       </p:sp>
@@ -13794,7 +14060,7 @@
 </p:sld>
 </file>
 
-<file path=ppt/slides/slide35.xml><?xml version="1.0" encoding="utf-8"?>
+<file path=ppt/slides/slide36.xml><?xml version="1.0" encoding="utf-8"?>
 <p:sld xmlns:a="http://schemas.openxmlformats.org/drawingml/2006/main" xmlns:r="http://schemas.openxmlformats.org/officeDocument/2006/relationships" xmlns:p="http://schemas.openxmlformats.org/presentationml/2006/main">
   <p:cSld>
     <p:spTree>
@@ -13869,7 +14135,7 @@
           <a:p>
             <a:r>
               <a:rPr lang="en-US" dirty="0"/>
-              <a:t>The core idea behind word embeddings is the distributional hypothesis of language: ``you shall know a word by the company it keeps’’. </a:t>
+              <a:t>The core idea behind word embeddings is the distributional hypothesis of language: “you shall know a word by the company it keeps’’. </a:t>
             </a:r>
           </a:p>
         </p:txBody>
@@ -13887,7 +14153,7 @@
 </p:sld>
 </file>
 
-<file path=ppt/slides/slide36.xml><?xml version="1.0" encoding="utf-8"?>
+<file path=ppt/slides/slide37.xml><?xml version="1.0" encoding="utf-8"?>
 <p:sld xmlns:a="http://schemas.openxmlformats.org/drawingml/2006/main" xmlns:r="http://schemas.openxmlformats.org/officeDocument/2006/relationships" xmlns:p="http://schemas.openxmlformats.org/presentationml/2006/main">
   <p:cSld>
     <p:bg>
@@ -14100,7 +14366,7 @@
 </p:sld>
 </file>
 
-<file path=ppt/slides/slide37.xml><?xml version="1.0" encoding="utf-8"?>
+<file path=ppt/slides/slide38.xml><?xml version="1.0" encoding="utf-8"?>
 <p:sld xmlns:a="http://schemas.openxmlformats.org/drawingml/2006/main" xmlns:r="http://schemas.openxmlformats.org/officeDocument/2006/relationships" xmlns:p="http://schemas.openxmlformats.org/presentationml/2006/main">
   <p:cSld>
     <p:spTree>
@@ -18395,7 +18661,7 @@
 </p:sld>
 </file>
 
-<file path=ppt/slides/slide38.xml><?xml version="1.0" encoding="utf-8"?>
+<file path=ppt/slides/slide39.xml><?xml version="1.0" encoding="utf-8"?>
 <p:sld xmlns:a="http://schemas.openxmlformats.org/drawingml/2006/main" xmlns:r="http://schemas.openxmlformats.org/officeDocument/2006/relationships" xmlns:p="http://schemas.openxmlformats.org/presentationml/2006/main">
   <p:cSld>
     <p:bg>
@@ -18608,7 +18874,142 @@
 </p:sld>
 </file>
 
-<file path=ppt/slides/slide39.xml><?xml version="1.0" encoding="utf-8"?>
+<file path=ppt/slides/slide4.xml><?xml version="1.0" encoding="utf-8"?>
+<p:sld xmlns:a="http://schemas.openxmlformats.org/drawingml/2006/main" xmlns:r="http://schemas.openxmlformats.org/officeDocument/2006/relationships" xmlns:p="http://schemas.openxmlformats.org/presentationml/2006/main">
+  <p:cSld>
+    <p:spTree>
+      <p:nvGrpSpPr>
+        <p:cNvPr id="1" name=""/>
+        <p:cNvGrpSpPr/>
+        <p:nvPr/>
+      </p:nvGrpSpPr>
+      <p:grpSpPr>
+        <a:xfrm>
+          <a:off x="0" y="0"/>
+          <a:ext cx="0" cy="0"/>
+          <a:chOff x="0" y="0"/>
+          <a:chExt cx="0" cy="0"/>
+        </a:xfrm>
+      </p:grpSpPr>
+      <p:sp>
+        <p:nvSpPr>
+          <p:cNvPr id="2" name="Title 1">
+            <a:extLst>
+              <a:ext uri="{FF2B5EF4-FFF2-40B4-BE49-F238E27FC236}">
+                <a16:creationId xmlns:a16="http://schemas.microsoft.com/office/drawing/2014/main" id="{D048D3AB-28F4-511B-D714-C0B1A4D292F2}"/>
+              </a:ext>
+            </a:extLst>
+          </p:cNvPr>
+          <p:cNvSpPr>
+            <a:spLocks noGrp="1"/>
+          </p:cNvSpPr>
+          <p:nvPr>
+            <p:ph type="title"/>
+          </p:nvPr>
+        </p:nvSpPr>
+        <p:spPr/>
+        <p:txBody>
+          <a:bodyPr/>
+          <a:lstStyle/>
+          <a:p>
+            <a:endParaRPr lang="en-US"/>
+          </a:p>
+        </p:txBody>
+      </p:sp>
+      <p:sp>
+        <p:nvSpPr>
+          <p:cNvPr id="3" name="Content Placeholder 2">
+            <a:extLst>
+              <a:ext uri="{FF2B5EF4-FFF2-40B4-BE49-F238E27FC236}">
+                <a16:creationId xmlns:a16="http://schemas.microsoft.com/office/drawing/2014/main" id="{DA4ECB9A-BAFD-EF3E-0435-390A23CFEA2B}"/>
+              </a:ext>
+            </a:extLst>
+          </p:cNvPr>
+          <p:cNvSpPr>
+            <a:spLocks noGrp="1"/>
+          </p:cNvSpPr>
+          <p:nvPr>
+            <p:ph idx="1"/>
+          </p:nvPr>
+        </p:nvSpPr>
+        <p:spPr/>
+        <p:txBody>
+          <a:bodyPr/>
+          <a:lstStyle/>
+          <a:p>
+            <a:r>
+              <a:rPr lang="en-US" dirty="0"/>
+              <a:t>Daunting… </a:t>
+            </a:r>
+          </a:p>
+          <a:p>
+            <a:r>
+              <a:rPr lang="en-US" dirty="0"/>
+              <a:t>That’s where we are heading… but to understand this, we first need to:</a:t>
+            </a:r>
+          </a:p>
+          <a:p>
+            <a:pPr lvl="1"/>
+            <a:r>
+              <a:rPr lang="en-US" dirty="0"/>
+              <a:t>Understand the difference between sparse representation (i.e., </a:t>
+            </a:r>
+            <a:r>
+              <a:rPr lang="en-US" dirty="0" err="1"/>
+              <a:t>dfm</a:t>
+            </a:r>
+            <a:r>
+              <a:rPr lang="en-US" dirty="0"/>
+              <a:t>) and dense representation of words (i.e., word embeddings). </a:t>
+            </a:r>
+          </a:p>
+          <a:p>
+            <a:pPr lvl="1"/>
+            <a:r>
+              <a:rPr lang="en-US" dirty="0"/>
+              <a:t>Have an intuitive understanding of how neural network models operate</a:t>
+            </a:r>
+          </a:p>
+          <a:p>
+            <a:pPr lvl="1"/>
+            <a:r>
+              <a:rPr lang="en-US" dirty="0"/>
+              <a:t>Understand attention mechanisms.</a:t>
+            </a:r>
+          </a:p>
+          <a:p>
+            <a:pPr lvl="1"/>
+            <a:r>
+              <a:rPr lang="en-US" dirty="0"/>
+              <a:t>Stack all of this into a Transformer architecture. </a:t>
+            </a:r>
+          </a:p>
+          <a:p>
+            <a:pPr lvl="1"/>
+            <a:endParaRPr lang="en-US" dirty="0"/>
+          </a:p>
+          <a:p>
+            <a:r>
+              <a:rPr lang="en-US" dirty="0"/>
+              <a:t>Let’s start!</a:t>
+            </a:r>
+          </a:p>
+        </p:txBody>
+      </p:sp>
+    </p:spTree>
+    <p:extLst>
+      <p:ext uri="{BB962C8B-B14F-4D97-AF65-F5344CB8AC3E}">
+        <p14:creationId xmlns:p14="http://schemas.microsoft.com/office/powerpoint/2010/main" val="1084019795"/>
+      </p:ext>
+    </p:extLst>
+  </p:cSld>
+  <p:clrMapOvr>
+    <a:masterClrMapping/>
+  </p:clrMapOvr>
+</p:sld>
+</file>
+
+<file path=ppt/slides/slide40.xml><?xml version="1.0" encoding="utf-8"?>
 <p:sld xmlns:a="http://schemas.openxmlformats.org/drawingml/2006/main" xmlns:r="http://schemas.openxmlformats.org/officeDocument/2006/relationships" xmlns:p="http://schemas.openxmlformats.org/presentationml/2006/main">
   <p:cSld>
     <p:spTree>
@@ -18697,142 +19098,7 @@
 </p:sld>
 </file>
 
-<file path=ppt/slides/slide4.xml><?xml version="1.0" encoding="utf-8"?>
-<p:sld xmlns:a="http://schemas.openxmlformats.org/drawingml/2006/main" xmlns:r="http://schemas.openxmlformats.org/officeDocument/2006/relationships" xmlns:p="http://schemas.openxmlformats.org/presentationml/2006/main">
-  <p:cSld>
-    <p:spTree>
-      <p:nvGrpSpPr>
-        <p:cNvPr id="1" name=""/>
-        <p:cNvGrpSpPr/>
-        <p:nvPr/>
-      </p:nvGrpSpPr>
-      <p:grpSpPr>
-        <a:xfrm>
-          <a:off x="0" y="0"/>
-          <a:ext cx="0" cy="0"/>
-          <a:chOff x="0" y="0"/>
-          <a:chExt cx="0" cy="0"/>
-        </a:xfrm>
-      </p:grpSpPr>
-      <p:sp>
-        <p:nvSpPr>
-          <p:cNvPr id="2" name="Title 1">
-            <a:extLst>
-              <a:ext uri="{FF2B5EF4-FFF2-40B4-BE49-F238E27FC236}">
-                <a16:creationId xmlns:a16="http://schemas.microsoft.com/office/drawing/2014/main" id="{D048D3AB-28F4-511B-D714-C0B1A4D292F2}"/>
-              </a:ext>
-            </a:extLst>
-          </p:cNvPr>
-          <p:cNvSpPr>
-            <a:spLocks noGrp="1"/>
-          </p:cNvSpPr>
-          <p:nvPr>
-            <p:ph type="title"/>
-          </p:nvPr>
-        </p:nvSpPr>
-        <p:spPr/>
-        <p:txBody>
-          <a:bodyPr/>
-          <a:lstStyle/>
-          <a:p>
-            <a:endParaRPr lang="en-US"/>
-          </a:p>
-        </p:txBody>
-      </p:sp>
-      <p:sp>
-        <p:nvSpPr>
-          <p:cNvPr id="3" name="Content Placeholder 2">
-            <a:extLst>
-              <a:ext uri="{FF2B5EF4-FFF2-40B4-BE49-F238E27FC236}">
-                <a16:creationId xmlns:a16="http://schemas.microsoft.com/office/drawing/2014/main" id="{DA4ECB9A-BAFD-EF3E-0435-390A23CFEA2B}"/>
-              </a:ext>
-            </a:extLst>
-          </p:cNvPr>
-          <p:cNvSpPr>
-            <a:spLocks noGrp="1"/>
-          </p:cNvSpPr>
-          <p:nvPr>
-            <p:ph idx="1"/>
-          </p:nvPr>
-        </p:nvSpPr>
-        <p:spPr/>
-        <p:txBody>
-          <a:bodyPr/>
-          <a:lstStyle/>
-          <a:p>
-            <a:r>
-              <a:rPr lang="en-US" dirty="0"/>
-              <a:t>Daunting… </a:t>
-            </a:r>
-          </a:p>
-          <a:p>
-            <a:r>
-              <a:rPr lang="en-US" dirty="0"/>
-              <a:t>That’s where we are heading… but to understand this, we first need to:</a:t>
-            </a:r>
-          </a:p>
-          <a:p>
-            <a:pPr lvl="1"/>
-            <a:r>
-              <a:rPr lang="en-US" dirty="0"/>
-              <a:t>Understand the difference between sparse representation (i.e., </a:t>
-            </a:r>
-            <a:r>
-              <a:rPr lang="en-US" dirty="0" err="1"/>
-              <a:t>dfm</a:t>
-            </a:r>
-            <a:r>
-              <a:rPr lang="en-US" dirty="0"/>
-              <a:t>) and dense representation of words (i.e., word embeddings). </a:t>
-            </a:r>
-          </a:p>
-          <a:p>
-            <a:pPr lvl="1"/>
-            <a:r>
-              <a:rPr lang="en-US" dirty="0"/>
-              <a:t>Have an intuitive understanding of how neural network models operate</a:t>
-            </a:r>
-          </a:p>
-          <a:p>
-            <a:pPr lvl="1"/>
-            <a:r>
-              <a:rPr lang="en-US" dirty="0"/>
-              <a:t>Understand attention mechanisms.</a:t>
-            </a:r>
-          </a:p>
-          <a:p>
-            <a:pPr lvl="1"/>
-            <a:r>
-              <a:rPr lang="en-US" dirty="0"/>
-              <a:t>Stack all of this into a Transformer architecture. </a:t>
-            </a:r>
-          </a:p>
-          <a:p>
-            <a:pPr lvl="1"/>
-            <a:endParaRPr lang="en-US" dirty="0"/>
-          </a:p>
-          <a:p>
-            <a:r>
-              <a:rPr lang="en-US" dirty="0"/>
-              <a:t>Let’s start!</a:t>
-            </a:r>
-          </a:p>
-        </p:txBody>
-      </p:sp>
-    </p:spTree>
-    <p:extLst>
-      <p:ext uri="{BB962C8B-B14F-4D97-AF65-F5344CB8AC3E}">
-        <p14:creationId xmlns:p14="http://schemas.microsoft.com/office/powerpoint/2010/main" val="1084019795"/>
-      </p:ext>
-    </p:extLst>
-  </p:cSld>
-  <p:clrMapOvr>
-    <a:masterClrMapping/>
-  </p:clrMapOvr>
-</p:sld>
-</file>
-
-<file path=ppt/slides/slide40.xml><?xml version="1.0" encoding="utf-8"?>
+<file path=ppt/slides/slide41.xml><?xml version="1.0" encoding="utf-8"?>
 <p:sld xmlns:a="http://schemas.openxmlformats.org/drawingml/2006/main" xmlns:r="http://schemas.openxmlformats.org/officeDocument/2006/relationships" xmlns:p="http://schemas.openxmlformats.org/presentationml/2006/main">
   <p:cSld>
     <p:spTree>
@@ -19315,7 +19581,7 @@
 </p:sld>
 </file>
 
-<file path=ppt/slides/slide41.xml><?xml version="1.0" encoding="utf-8"?>
+<file path=ppt/slides/slide42.xml><?xml version="1.0" encoding="utf-8"?>
 <p:sld xmlns:a="http://schemas.openxmlformats.org/drawingml/2006/main" xmlns:r="http://schemas.openxmlformats.org/officeDocument/2006/relationships" xmlns:p="http://schemas.openxmlformats.org/presentationml/2006/main">
   <p:cSld>
     <p:spTree>
@@ -20183,7 +20449,7 @@
 </p:sld>
 </file>
 
-<file path=ppt/slides/slide42.xml><?xml version="1.0" encoding="utf-8"?>
+<file path=ppt/slides/slide43.xml><?xml version="1.0" encoding="utf-8"?>
 <p:sld xmlns:a="http://schemas.openxmlformats.org/drawingml/2006/main" xmlns:r="http://schemas.openxmlformats.org/officeDocument/2006/relationships" xmlns:p="http://schemas.openxmlformats.org/presentationml/2006/main">
   <p:cSld>
     <p:spTree>
@@ -21199,7 +21465,7 @@
 </p:sld>
 </file>
 
-<file path=ppt/slides/slide43.xml><?xml version="1.0" encoding="utf-8"?>
+<file path=ppt/slides/slide44.xml><?xml version="1.0" encoding="utf-8"?>
 <p:sld xmlns:a="http://schemas.openxmlformats.org/drawingml/2006/main" xmlns:r="http://schemas.openxmlformats.org/officeDocument/2006/relationships" xmlns:p="http://schemas.openxmlformats.org/presentationml/2006/main">
   <p:cSld>
     <p:spTree>
@@ -21945,7 +22211,7 @@
 </p:sld>
 </file>
 
-<file path=ppt/slides/slide44.xml><?xml version="1.0" encoding="utf-8"?>
+<file path=ppt/slides/slide45.xml><?xml version="1.0" encoding="utf-8"?>
 <p:sld xmlns:a="http://schemas.openxmlformats.org/drawingml/2006/main" xmlns:r="http://schemas.openxmlformats.org/officeDocument/2006/relationships" xmlns:p="http://schemas.openxmlformats.org/presentationml/2006/main">
   <p:cSld>
     <p:spTree>
@@ -22647,7 +22913,435 @@
 </p:sld>
 </file>
 
-<file path=ppt/slides/slide45.xml><?xml version="1.0" encoding="utf-8"?>
+<file path=ppt/slides/slide46.xml><?xml version="1.0" encoding="utf-8"?>
+<p:sld xmlns:a="http://schemas.openxmlformats.org/drawingml/2006/main" xmlns:r="http://schemas.openxmlformats.org/officeDocument/2006/relationships" xmlns:p="http://schemas.openxmlformats.org/presentationml/2006/main">
+  <p:cSld>
+    <p:spTree>
+      <p:nvGrpSpPr>
+        <p:cNvPr id="1" name=""/>
+        <p:cNvGrpSpPr/>
+        <p:nvPr/>
+      </p:nvGrpSpPr>
+      <p:grpSpPr>
+        <a:xfrm>
+          <a:off x="0" y="0"/>
+          <a:ext cx="0" cy="0"/>
+          <a:chOff x="0" y="0"/>
+          <a:chExt cx="0" cy="0"/>
+        </a:xfrm>
+      </p:grpSpPr>
+      <p:sp>
+        <p:nvSpPr>
+          <p:cNvPr id="2" name="Title 1">
+            <a:extLst>
+              <a:ext uri="{FF2B5EF4-FFF2-40B4-BE49-F238E27FC236}">
+                <a16:creationId xmlns:a16="http://schemas.microsoft.com/office/drawing/2014/main" id="{EAC62A07-98CD-1460-3F0B-2D90B3D629D2}"/>
+              </a:ext>
+            </a:extLst>
+          </p:cNvPr>
+          <p:cNvSpPr>
+            <a:spLocks noGrp="1"/>
+          </p:cNvSpPr>
+          <p:nvPr>
+            <p:ph type="title"/>
+          </p:nvPr>
+        </p:nvSpPr>
+        <p:spPr/>
+        <p:txBody>
+          <a:bodyPr/>
+          <a:lstStyle/>
+          <a:p>
+            <a:r>
+              <a:rPr lang="en-US" dirty="0"/>
+              <a:t>word2vec</a:t>
+            </a:r>
+          </a:p>
+        </p:txBody>
+      </p:sp>
+      <p:pic>
+        <p:nvPicPr>
+          <p:cNvPr id="3" name="Picture 2">
+            <a:extLst>
+              <a:ext uri="{FF2B5EF4-FFF2-40B4-BE49-F238E27FC236}">
+                <a16:creationId xmlns:a16="http://schemas.microsoft.com/office/drawing/2014/main" id="{EF2DD4A4-08B5-CE0A-C863-0A771FAF7924}"/>
+              </a:ext>
+            </a:extLst>
+          </p:cNvPr>
+          <p:cNvPicPr>
+            <a:picLocks noChangeAspect="1"/>
+          </p:cNvPicPr>
+          <p:nvPr/>
+        </p:nvPicPr>
+        <p:blipFill>
+          <a:blip r:embed="rId2"/>
+          <a:stretch>
+            <a:fillRect/>
+          </a:stretch>
+        </p:blipFill>
+        <p:spPr>
+          <a:xfrm>
+            <a:off x="2648180" y="1743280"/>
+            <a:ext cx="7408076" cy="4302285"/>
+          </a:xfrm>
+          <a:prstGeom prst="rect">
+            <a:avLst/>
+          </a:prstGeom>
+        </p:spPr>
+      </p:pic>
+    </p:spTree>
+    <p:extLst>
+      <p:ext uri="{BB962C8B-B14F-4D97-AF65-F5344CB8AC3E}">
+        <p14:creationId xmlns:p14="http://schemas.microsoft.com/office/powerpoint/2010/main" val="4232520081"/>
+      </p:ext>
+    </p:extLst>
+  </p:cSld>
+  <p:clrMapOvr>
+    <a:masterClrMapping/>
+  </p:clrMapOvr>
+</p:sld>
+</file>
+
+<file path=ppt/slides/slide47.xml><?xml version="1.0" encoding="utf-8"?>
+<p:sld xmlns:a="http://schemas.openxmlformats.org/drawingml/2006/main" xmlns:r="http://schemas.openxmlformats.org/officeDocument/2006/relationships" xmlns:p="http://schemas.openxmlformats.org/presentationml/2006/main">
+  <p:cSld>
+    <p:spTree>
+      <p:nvGrpSpPr>
+        <p:cNvPr id="1" name=""/>
+        <p:cNvGrpSpPr/>
+        <p:nvPr/>
+      </p:nvGrpSpPr>
+      <p:grpSpPr>
+        <a:xfrm>
+          <a:off x="0" y="0"/>
+          <a:ext cx="0" cy="0"/>
+          <a:chOff x="0" y="0"/>
+          <a:chExt cx="0" cy="0"/>
+        </a:xfrm>
+      </p:grpSpPr>
+      <p:sp>
+        <p:nvSpPr>
+          <p:cNvPr id="2" name="Title 1">
+            <a:extLst>
+              <a:ext uri="{FF2B5EF4-FFF2-40B4-BE49-F238E27FC236}">
+                <a16:creationId xmlns:a16="http://schemas.microsoft.com/office/drawing/2014/main" id="{CF35E70B-F2A6-341D-0803-784DD957D239}"/>
+              </a:ext>
+            </a:extLst>
+          </p:cNvPr>
+          <p:cNvSpPr>
+            <a:spLocks noGrp="1"/>
+          </p:cNvSpPr>
+          <p:nvPr>
+            <p:ph type="title"/>
+          </p:nvPr>
+        </p:nvSpPr>
+        <p:spPr/>
+        <p:txBody>
+          <a:bodyPr/>
+          <a:lstStyle/>
+          <a:p>
+            <a:endParaRPr lang="en-US"/>
+          </a:p>
+        </p:txBody>
+      </p:sp>
+      <p:pic>
+        <p:nvPicPr>
+          <p:cNvPr id="3" name="Picture 2">
+            <a:extLst>
+              <a:ext uri="{FF2B5EF4-FFF2-40B4-BE49-F238E27FC236}">
+                <a16:creationId xmlns:a16="http://schemas.microsoft.com/office/drawing/2014/main" id="{ACC48218-E4CE-5F97-5133-188BB78FEC24}"/>
+              </a:ext>
+            </a:extLst>
+          </p:cNvPr>
+          <p:cNvPicPr>
+            <a:picLocks noChangeAspect="1"/>
+          </p:cNvPicPr>
+          <p:nvPr/>
+        </p:nvPicPr>
+        <p:blipFill>
+          <a:blip r:embed="rId2"/>
+          <a:stretch>
+            <a:fillRect/>
+          </a:stretch>
+        </p:blipFill>
+        <p:spPr>
+          <a:xfrm>
+            <a:off x="2324930" y="1803811"/>
+            <a:ext cx="7542139" cy="3250378"/>
+          </a:xfrm>
+          <a:prstGeom prst="rect">
+            <a:avLst/>
+          </a:prstGeom>
+        </p:spPr>
+      </p:pic>
+    </p:spTree>
+    <p:extLst>
+      <p:ext uri="{BB962C8B-B14F-4D97-AF65-F5344CB8AC3E}">
+        <p14:creationId xmlns:p14="http://schemas.microsoft.com/office/powerpoint/2010/main" val="3668267504"/>
+      </p:ext>
+    </p:extLst>
+  </p:cSld>
+  <p:clrMapOvr>
+    <a:masterClrMapping/>
+  </p:clrMapOvr>
+</p:sld>
+</file>
+
+<file path=ppt/slides/slide48.xml><?xml version="1.0" encoding="utf-8"?>
+<p:sld xmlns:a="http://schemas.openxmlformats.org/drawingml/2006/main" xmlns:r="http://schemas.openxmlformats.org/officeDocument/2006/relationships" xmlns:p="http://schemas.openxmlformats.org/presentationml/2006/main">
+  <p:cSld>
+    <p:spTree>
+      <p:nvGrpSpPr>
+        <p:cNvPr id="1" name=""/>
+        <p:cNvGrpSpPr/>
+        <p:nvPr/>
+      </p:nvGrpSpPr>
+      <p:grpSpPr>
+        <a:xfrm>
+          <a:off x="0" y="0"/>
+          <a:ext cx="0" cy="0"/>
+          <a:chOff x="0" y="0"/>
+          <a:chExt cx="0" cy="0"/>
+        </a:xfrm>
+      </p:grpSpPr>
+      <p:sp>
+        <p:nvSpPr>
+          <p:cNvPr id="2" name="Title 1">
+            <a:extLst>
+              <a:ext uri="{FF2B5EF4-FFF2-40B4-BE49-F238E27FC236}">
+                <a16:creationId xmlns:a16="http://schemas.microsoft.com/office/drawing/2014/main" id="{2BAE0C26-C698-5A67-F4D7-696CA01C9C92}"/>
+              </a:ext>
+            </a:extLst>
+          </p:cNvPr>
+          <p:cNvSpPr>
+            <a:spLocks noGrp="1"/>
+          </p:cNvSpPr>
+          <p:nvPr>
+            <p:ph type="title"/>
+          </p:nvPr>
+        </p:nvSpPr>
+        <p:spPr/>
+        <p:txBody>
+          <a:bodyPr/>
+          <a:lstStyle/>
+          <a:p>
+            <a:endParaRPr lang="en-US"/>
+          </a:p>
+        </p:txBody>
+      </p:sp>
+      <p:pic>
+        <p:nvPicPr>
+          <p:cNvPr id="3" name="Picture 2">
+            <a:extLst>
+              <a:ext uri="{FF2B5EF4-FFF2-40B4-BE49-F238E27FC236}">
+                <a16:creationId xmlns:a16="http://schemas.microsoft.com/office/drawing/2014/main" id="{612047C6-1E68-565A-8A9F-72103CA88430}"/>
+              </a:ext>
+            </a:extLst>
+          </p:cNvPr>
+          <p:cNvPicPr>
+            <a:picLocks noChangeAspect="1"/>
+          </p:cNvPicPr>
+          <p:nvPr/>
+        </p:nvPicPr>
+        <p:blipFill>
+          <a:blip r:embed="rId2"/>
+          <a:stretch>
+            <a:fillRect/>
+          </a:stretch>
+        </p:blipFill>
+        <p:spPr>
+          <a:xfrm>
+            <a:off x="2152587" y="2279353"/>
+            <a:ext cx="7886826" cy="2299294"/>
+          </a:xfrm>
+          <a:prstGeom prst="rect">
+            <a:avLst/>
+          </a:prstGeom>
+        </p:spPr>
+      </p:pic>
+    </p:spTree>
+    <p:extLst>
+      <p:ext uri="{BB962C8B-B14F-4D97-AF65-F5344CB8AC3E}">
+        <p14:creationId xmlns:p14="http://schemas.microsoft.com/office/powerpoint/2010/main" val="1295579852"/>
+      </p:ext>
+    </p:extLst>
+  </p:cSld>
+  <p:clrMapOvr>
+    <a:masterClrMapping/>
+  </p:clrMapOvr>
+</p:sld>
+</file>
+
+<file path=ppt/slides/slide49.xml><?xml version="1.0" encoding="utf-8"?>
+<p:sld xmlns:a="http://schemas.openxmlformats.org/drawingml/2006/main" xmlns:r="http://schemas.openxmlformats.org/officeDocument/2006/relationships" xmlns:p="http://schemas.openxmlformats.org/presentationml/2006/main">
+  <p:cSld>
+    <p:spTree>
+      <p:nvGrpSpPr>
+        <p:cNvPr id="1" name=""/>
+        <p:cNvGrpSpPr/>
+        <p:nvPr/>
+      </p:nvGrpSpPr>
+      <p:grpSpPr>
+        <a:xfrm>
+          <a:off x="0" y="0"/>
+          <a:ext cx="0" cy="0"/>
+          <a:chOff x="0" y="0"/>
+          <a:chExt cx="0" cy="0"/>
+        </a:xfrm>
+      </p:grpSpPr>
+      <p:sp>
+        <p:nvSpPr>
+          <p:cNvPr id="2" name="Title 1">
+            <a:extLst>
+              <a:ext uri="{FF2B5EF4-FFF2-40B4-BE49-F238E27FC236}">
+                <a16:creationId xmlns:a16="http://schemas.microsoft.com/office/drawing/2014/main" id="{62C15870-6DB7-14C3-7F66-1A062F87E5C0}"/>
+              </a:ext>
+            </a:extLst>
+          </p:cNvPr>
+          <p:cNvSpPr>
+            <a:spLocks noGrp="1"/>
+          </p:cNvSpPr>
+          <p:nvPr>
+            <p:ph type="title"/>
+          </p:nvPr>
+        </p:nvSpPr>
+        <p:spPr/>
+        <p:txBody>
+          <a:bodyPr/>
+          <a:lstStyle/>
+          <a:p>
+            <a:endParaRPr lang="en-US"/>
+          </a:p>
+        </p:txBody>
+      </p:sp>
+      <p:pic>
+        <p:nvPicPr>
+          <p:cNvPr id="3" name="Picture 2">
+            <a:extLst>
+              <a:ext uri="{FF2B5EF4-FFF2-40B4-BE49-F238E27FC236}">
+                <a16:creationId xmlns:a16="http://schemas.microsoft.com/office/drawing/2014/main" id="{512B4EF7-217C-A0D5-42B8-ED10DA4B521C}"/>
+              </a:ext>
+            </a:extLst>
+          </p:cNvPr>
+          <p:cNvPicPr>
+            <a:picLocks noChangeAspect="1"/>
+          </p:cNvPicPr>
+          <p:nvPr/>
+        </p:nvPicPr>
+        <p:blipFill>
+          <a:blip r:embed="rId2"/>
+          <a:stretch>
+            <a:fillRect/>
+          </a:stretch>
+        </p:blipFill>
+        <p:spPr>
+          <a:xfrm>
+            <a:off x="2901635" y="1462436"/>
+            <a:ext cx="6388730" cy="3933127"/>
+          </a:xfrm>
+          <a:prstGeom prst="rect">
+            <a:avLst/>
+          </a:prstGeom>
+        </p:spPr>
+      </p:pic>
+    </p:spTree>
+    <p:extLst>
+      <p:ext uri="{BB962C8B-B14F-4D97-AF65-F5344CB8AC3E}">
+        <p14:creationId xmlns:p14="http://schemas.microsoft.com/office/powerpoint/2010/main" val="4293299986"/>
+      </p:ext>
+    </p:extLst>
+  </p:cSld>
+  <p:clrMapOvr>
+    <a:masterClrMapping/>
+  </p:clrMapOvr>
+</p:sld>
+</file>
+
+<file path=ppt/slides/slide5.xml><?xml version="1.0" encoding="utf-8"?>
+<p:sld xmlns:a="http://schemas.openxmlformats.org/drawingml/2006/main" xmlns:r="http://schemas.openxmlformats.org/officeDocument/2006/relationships" xmlns:p="http://schemas.openxmlformats.org/presentationml/2006/main">
+  <p:cSld>
+    <p:spTree>
+      <p:nvGrpSpPr>
+        <p:cNvPr id="1" name=""/>
+        <p:cNvGrpSpPr/>
+        <p:nvPr/>
+      </p:nvGrpSpPr>
+      <p:grpSpPr>
+        <a:xfrm>
+          <a:off x="0" y="0"/>
+          <a:ext cx="0" cy="0"/>
+          <a:chOff x="0" y="0"/>
+          <a:chExt cx="0" cy="0"/>
+        </a:xfrm>
+      </p:grpSpPr>
+      <p:sp>
+        <p:nvSpPr>
+          <p:cNvPr id="2" name="Title 1">
+            <a:extLst>
+              <a:ext uri="{FF2B5EF4-FFF2-40B4-BE49-F238E27FC236}">
+                <a16:creationId xmlns:a16="http://schemas.microsoft.com/office/drawing/2014/main" id="{D46BECCB-A2B6-5441-9391-393BD6D8E8A2}"/>
+              </a:ext>
+            </a:extLst>
+          </p:cNvPr>
+          <p:cNvSpPr>
+            <a:spLocks noGrp="1"/>
+          </p:cNvSpPr>
+          <p:nvPr>
+            <p:ph type="title"/>
+          </p:nvPr>
+        </p:nvSpPr>
+        <p:spPr/>
+        <p:txBody>
+          <a:bodyPr>
+            <a:normAutofit/>
+          </a:bodyPr>
+          <a:lstStyle/>
+          <a:p>
+            <a:r>
+              <a:rPr lang="en-US" sz="7200" dirty="0"/>
+              <a:t>Sparce Vectors</a:t>
+            </a:r>
+          </a:p>
+        </p:txBody>
+      </p:sp>
+      <p:sp>
+        <p:nvSpPr>
+          <p:cNvPr id="3" name="Text Placeholder 2">
+            <a:extLst>
+              <a:ext uri="{FF2B5EF4-FFF2-40B4-BE49-F238E27FC236}">
+                <a16:creationId xmlns:a16="http://schemas.microsoft.com/office/drawing/2014/main" id="{6D49D62C-751A-AEDC-24E7-451851FAC3ED}"/>
+              </a:ext>
+            </a:extLst>
+          </p:cNvPr>
+          <p:cNvSpPr>
+            <a:spLocks noGrp="1"/>
+          </p:cNvSpPr>
+          <p:nvPr>
+            <p:ph type="body" idx="1"/>
+          </p:nvPr>
+        </p:nvSpPr>
+        <p:spPr/>
+        <p:txBody>
+          <a:bodyPr/>
+          <a:lstStyle/>
+          <a:p>
+            <a:endParaRPr lang="en-US" dirty="0"/>
+          </a:p>
+        </p:txBody>
+      </p:sp>
+    </p:spTree>
+    <p:extLst>
+      <p:ext uri="{BB962C8B-B14F-4D97-AF65-F5344CB8AC3E}">
+        <p14:creationId xmlns:p14="http://schemas.microsoft.com/office/powerpoint/2010/main" val="970368605"/>
+      </p:ext>
+    </p:extLst>
+  </p:cSld>
+  <p:clrMapOvr>
+    <a:masterClrMapping/>
+  </p:clrMapOvr>
+</p:sld>
+</file>
+
+<file path=ppt/slides/slide50.xml><?xml version="1.0" encoding="utf-8"?>
 <p:sld xmlns:a="http://schemas.openxmlformats.org/drawingml/2006/main" xmlns:r="http://schemas.openxmlformats.org/officeDocument/2006/relationships" xmlns:p="http://schemas.openxmlformats.org/presentationml/2006/main">
   <p:cSld>
     <p:spTree>
@@ -22730,7 +23424,7 @@
 </p:sld>
 </file>
 
-<file path=ppt/slides/slide46.xml><?xml version="1.0" encoding="utf-8"?>
+<file path=ppt/slides/slide51.xml><?xml version="1.0" encoding="utf-8"?>
 <p:sld xmlns:a="http://schemas.openxmlformats.org/drawingml/2006/main" xmlns:r="http://schemas.openxmlformats.org/officeDocument/2006/relationships" xmlns:p="http://schemas.openxmlformats.org/presentationml/2006/main">
   <p:cSld>
     <p:spTree>
@@ -22861,7 +23555,7 @@
 </p:sld>
 </file>
 
-<file path=ppt/slides/slide47.xml><?xml version="1.0" encoding="utf-8"?>
+<file path=ppt/slides/slide52.xml><?xml version="1.0" encoding="utf-8"?>
 <p:sld xmlns:a="http://schemas.openxmlformats.org/drawingml/2006/main" xmlns:r="http://schemas.openxmlformats.org/officeDocument/2006/relationships" xmlns:p="http://schemas.openxmlformats.org/presentationml/2006/main">
   <p:cSld>
     <p:bg>
@@ -23064,7 +23758,7 @@
 </p:sld>
 </file>
 
-<file path=ppt/slides/slide48.xml><?xml version="1.0" encoding="utf-8"?>
+<file path=ppt/slides/slide53.xml><?xml version="1.0" encoding="utf-8"?>
 <p:sld xmlns:a="http://schemas.openxmlformats.org/drawingml/2006/main" xmlns:r="http://schemas.openxmlformats.org/officeDocument/2006/relationships" xmlns:p="http://schemas.openxmlformats.org/presentationml/2006/main">
   <p:cSld>
     <p:spTree>
@@ -23153,7 +23847,7 @@
 </p:sld>
 </file>
 
-<file path=ppt/slides/slide49.xml><?xml version="1.0" encoding="utf-8"?>
+<file path=ppt/slides/slide54.xml><?xml version="1.0" encoding="utf-8"?>
 <p:sld xmlns:a="http://schemas.openxmlformats.org/drawingml/2006/main" xmlns:r="http://schemas.openxmlformats.org/officeDocument/2006/relationships" xmlns:p="http://schemas.openxmlformats.org/presentationml/2006/main">
   <p:cSld>
     <p:spTree>
@@ -23239,92 +23933,7 @@
 </p:sld>
 </file>
 
-<file path=ppt/slides/slide5.xml><?xml version="1.0" encoding="utf-8"?>
-<p:sld xmlns:a="http://schemas.openxmlformats.org/drawingml/2006/main" xmlns:r="http://schemas.openxmlformats.org/officeDocument/2006/relationships" xmlns:p="http://schemas.openxmlformats.org/presentationml/2006/main">
-  <p:cSld>
-    <p:spTree>
-      <p:nvGrpSpPr>
-        <p:cNvPr id="1" name=""/>
-        <p:cNvGrpSpPr/>
-        <p:nvPr/>
-      </p:nvGrpSpPr>
-      <p:grpSpPr>
-        <a:xfrm>
-          <a:off x="0" y="0"/>
-          <a:ext cx="0" cy="0"/>
-          <a:chOff x="0" y="0"/>
-          <a:chExt cx="0" cy="0"/>
-        </a:xfrm>
-      </p:grpSpPr>
-      <p:sp>
-        <p:nvSpPr>
-          <p:cNvPr id="2" name="Title 1">
-            <a:extLst>
-              <a:ext uri="{FF2B5EF4-FFF2-40B4-BE49-F238E27FC236}">
-                <a16:creationId xmlns:a16="http://schemas.microsoft.com/office/drawing/2014/main" id="{D46BECCB-A2B6-5441-9391-393BD6D8E8A2}"/>
-              </a:ext>
-            </a:extLst>
-          </p:cNvPr>
-          <p:cNvSpPr>
-            <a:spLocks noGrp="1"/>
-          </p:cNvSpPr>
-          <p:nvPr>
-            <p:ph type="title"/>
-          </p:nvPr>
-        </p:nvSpPr>
-        <p:spPr/>
-        <p:txBody>
-          <a:bodyPr>
-            <a:normAutofit/>
-          </a:bodyPr>
-          <a:lstStyle/>
-          <a:p>
-            <a:r>
-              <a:rPr lang="en-US" sz="7200" dirty="0"/>
-              <a:t>Sparce Vectors</a:t>
-            </a:r>
-          </a:p>
-        </p:txBody>
-      </p:sp>
-      <p:sp>
-        <p:nvSpPr>
-          <p:cNvPr id="3" name="Text Placeholder 2">
-            <a:extLst>
-              <a:ext uri="{FF2B5EF4-FFF2-40B4-BE49-F238E27FC236}">
-                <a16:creationId xmlns:a16="http://schemas.microsoft.com/office/drawing/2014/main" id="{6D49D62C-751A-AEDC-24E7-451851FAC3ED}"/>
-              </a:ext>
-            </a:extLst>
-          </p:cNvPr>
-          <p:cNvSpPr>
-            <a:spLocks noGrp="1"/>
-          </p:cNvSpPr>
-          <p:nvPr>
-            <p:ph type="body" idx="1"/>
-          </p:nvPr>
-        </p:nvSpPr>
-        <p:spPr/>
-        <p:txBody>
-          <a:bodyPr/>
-          <a:lstStyle/>
-          <a:p>
-            <a:endParaRPr lang="en-US" dirty="0"/>
-          </a:p>
-        </p:txBody>
-      </p:sp>
-    </p:spTree>
-    <p:extLst>
-      <p:ext uri="{BB962C8B-B14F-4D97-AF65-F5344CB8AC3E}">
-        <p14:creationId xmlns:p14="http://schemas.microsoft.com/office/powerpoint/2010/main" val="970368605"/>
-      </p:ext>
-    </p:extLst>
-  </p:cSld>
-  <p:clrMapOvr>
-    <a:masterClrMapping/>
-  </p:clrMapOvr>
-</p:sld>
-</file>
-
-<file path=ppt/slides/slide50.xml><?xml version="1.0" encoding="utf-8"?>
+<file path=ppt/slides/slide55.xml><?xml version="1.0" encoding="utf-8"?>
 <p:sld xmlns:a="http://schemas.openxmlformats.org/drawingml/2006/main" xmlns:r="http://schemas.openxmlformats.org/officeDocument/2006/relationships" xmlns:p="http://schemas.openxmlformats.org/presentationml/2006/main">
   <p:cSld>
     <p:bg>
@@ -23521,7 +24130,7 @@
 </p:sld>
 </file>
 
-<file path=ppt/slides/slide51.xml><?xml version="1.0" encoding="utf-8"?>
+<file path=ppt/slides/slide56.xml><?xml version="1.0" encoding="utf-8"?>
 <p:sld xmlns:a="http://schemas.openxmlformats.org/drawingml/2006/main" xmlns:r="http://schemas.openxmlformats.org/officeDocument/2006/relationships" xmlns:p="http://schemas.openxmlformats.org/presentationml/2006/main">
   <p:cSld>
     <p:spTree>
@@ -23628,7 +24237,7 @@
 </p:sld>
 </file>
 
-<file path=ppt/slides/slide52.xml><?xml version="1.0" encoding="utf-8"?>
+<file path=ppt/slides/slide57.xml><?xml version="1.0" encoding="utf-8"?>
 <p:sld xmlns:a="http://schemas.openxmlformats.org/drawingml/2006/main" xmlns:r="http://schemas.openxmlformats.org/officeDocument/2006/relationships" xmlns:p="http://schemas.openxmlformats.org/presentationml/2006/main">
   <p:cSld>
     <p:spTree>
@@ -23739,7 +24348,7 @@
 </p:sld>
 </file>
 
-<file path=ppt/slides/slide53.xml><?xml version="1.0" encoding="utf-8"?>
+<file path=ppt/slides/slide58.xml><?xml version="1.0" encoding="utf-8"?>
 <p:sld xmlns:a="http://schemas.openxmlformats.org/drawingml/2006/main" xmlns:r="http://schemas.openxmlformats.org/officeDocument/2006/relationships" xmlns:p="http://schemas.openxmlformats.org/presentationml/2006/main">
   <p:cSld>
     <p:bg>
@@ -24110,7 +24719,7 @@
 </p:sld>
 </file>
 
-<file path=ppt/slides/slide54.xml><?xml version="1.0" encoding="utf-8"?>
+<file path=ppt/slides/slide59.xml><?xml version="1.0" encoding="utf-8"?>
 <p:sld xmlns:a="http://schemas.openxmlformats.org/drawingml/2006/main" xmlns:r="http://schemas.openxmlformats.org/officeDocument/2006/relationships" xmlns:p="http://schemas.openxmlformats.org/presentationml/2006/main">
   <p:cSld>
     <p:bg>
@@ -24295,842 +24904,6 @@
     <p:extLst>
       <p:ext uri="{BB962C8B-B14F-4D97-AF65-F5344CB8AC3E}">
         <p14:creationId xmlns:p14="http://schemas.microsoft.com/office/powerpoint/2010/main" val="3448374936"/>
-      </p:ext>
-    </p:extLst>
-  </p:cSld>
-  <p:clrMapOvr>
-    <a:masterClrMapping/>
-  </p:clrMapOvr>
-</p:sld>
-</file>
-
-<file path=ppt/slides/slide55.xml><?xml version="1.0" encoding="utf-8"?>
-<p:sld xmlns:a="http://schemas.openxmlformats.org/drawingml/2006/main" xmlns:r="http://schemas.openxmlformats.org/officeDocument/2006/relationships" xmlns:p="http://schemas.openxmlformats.org/presentationml/2006/main">
-  <p:cSld>
-    <p:bg>
-      <p:bgPr>
-        <a:solidFill>
-          <a:schemeClr val="bg2"/>
-        </a:solidFill>
-        <a:effectLst/>
-      </p:bgPr>
-    </p:bg>
-    <p:spTree>
-      <p:nvGrpSpPr>
-        <p:cNvPr id="1" name=""/>
-        <p:cNvGrpSpPr/>
-        <p:nvPr/>
-      </p:nvGrpSpPr>
-      <p:grpSpPr>
-        <a:xfrm>
-          <a:off x="0" y="0"/>
-          <a:ext cx="0" cy="0"/>
-          <a:chOff x="0" y="0"/>
-          <a:chExt cx="0" cy="0"/>
-        </a:xfrm>
-      </p:grpSpPr>
-      <p:sp>
-        <p:nvSpPr>
-          <p:cNvPr id="8" name="Rectangle 7">
-            <a:extLst>
-              <a:ext uri="{FF2B5EF4-FFF2-40B4-BE49-F238E27FC236}">
-                <a16:creationId xmlns:a16="http://schemas.microsoft.com/office/drawing/2014/main" id="{CE606343-BADE-4565-AB89-E9EF7E253F80}"/>
-              </a:ext>
-              <a:ext uri="{C183D7F6-B498-43B3-948B-1728B52AA6E4}">
-                <adec:decorative xmlns:adec="http://schemas.microsoft.com/office/drawing/2017/decorative" val="1"/>
-              </a:ext>
-            </a:extLst>
-          </p:cNvPr>
-          <p:cNvSpPr>
-            <a:spLocks noGrp="1" noRot="1" noChangeAspect="1" noMove="1" noResize="1" noEditPoints="1" noAdjustHandles="1" noChangeArrowheads="1" noChangeShapeType="1" noTextEdit="1"/>
-          </p:cNvSpPr>
-          <p:nvPr>
-            <p:extLst>
-              <p:ext uri="{386F3935-93C4-4BCD-93E2-E3B085C9AB24}">
-                <p16:designElem xmlns:p16="http://schemas.microsoft.com/office/powerpoint/2015/main" val="1"/>
-              </p:ext>
-            </p:extLst>
-          </p:nvPr>
-        </p:nvSpPr>
-        <p:spPr>
-          <a:xfrm>
-            <a:off x="0" y="0"/>
-            <a:ext cx="12192000" cy="6858000"/>
-          </a:xfrm>
-          <a:prstGeom prst="rect">
-            <a:avLst/>
-          </a:prstGeom>
-          <a:solidFill>
-            <a:schemeClr val="tx1">
-              <a:lumMod val="65000"/>
-              <a:lumOff val="35000"/>
-            </a:schemeClr>
-          </a:solidFill>
-          <a:ln>
-            <a:noFill/>
-          </a:ln>
-        </p:spPr>
-        <p:style>
-          <a:lnRef idx="2">
-            <a:schemeClr val="accent1">
-              <a:shade val="50000"/>
-            </a:schemeClr>
-          </a:lnRef>
-          <a:fillRef idx="1">
-            <a:schemeClr val="accent1"/>
-          </a:fillRef>
-          <a:effectRef idx="0">
-            <a:schemeClr val="accent1"/>
-          </a:effectRef>
-          <a:fontRef idx="minor">
-            <a:schemeClr val="lt1"/>
-          </a:fontRef>
-        </p:style>
-        <p:txBody>
-          <a:bodyPr rtlCol="0" anchor="ctr"/>
-          <a:lstStyle/>
-          <a:p>
-            <a:pPr algn="ctr"/>
-            <a:endParaRPr lang="en-US"/>
-          </a:p>
-        </p:txBody>
-      </p:sp>
-      <p:sp>
-        <p:nvSpPr>
-          <p:cNvPr id="10" name="Rectangle 9">
-            <a:extLst>
-              <a:ext uri="{FF2B5EF4-FFF2-40B4-BE49-F238E27FC236}">
-                <a16:creationId xmlns:a16="http://schemas.microsoft.com/office/drawing/2014/main" id="{39E183BD-2932-401F-8B53-E247764B376B}"/>
-              </a:ext>
-              <a:ext uri="{C183D7F6-B498-43B3-948B-1728B52AA6E4}">
-                <adec:decorative xmlns:adec="http://schemas.microsoft.com/office/drawing/2017/decorative" val="1"/>
-              </a:ext>
-            </a:extLst>
-          </p:cNvPr>
-          <p:cNvSpPr>
-            <a:spLocks noGrp="1" noRot="1" noChangeAspect="1" noMove="1" noResize="1" noEditPoints="1" noAdjustHandles="1" noChangeArrowheads="1" noChangeShapeType="1" noTextEdit="1"/>
-          </p:cNvSpPr>
-          <p:nvPr>
-            <p:extLst>
-              <p:ext uri="{386F3935-93C4-4BCD-93E2-E3B085C9AB24}">
-                <p16:designElem xmlns:p16="http://schemas.microsoft.com/office/powerpoint/2015/main" val="1"/>
-              </p:ext>
-            </p:extLst>
-          </p:nvPr>
-        </p:nvSpPr>
-        <p:spPr>
-          <a:xfrm>
-            <a:off x="477012" y="480060"/>
-            <a:ext cx="11237976" cy="5897880"/>
-          </a:xfrm>
-          <a:prstGeom prst="rect">
-            <a:avLst/>
-          </a:prstGeom>
-          <a:solidFill>
-            <a:srgbClr val="FFFFFF"/>
-          </a:solidFill>
-          <a:ln>
-            <a:noFill/>
-          </a:ln>
-        </p:spPr>
-        <p:style>
-          <a:lnRef idx="2">
-            <a:schemeClr val="accent1">
-              <a:shade val="50000"/>
-            </a:schemeClr>
-          </a:lnRef>
-          <a:fillRef idx="1">
-            <a:schemeClr val="accent1"/>
-          </a:fillRef>
-          <a:effectRef idx="0">
-            <a:schemeClr val="accent1"/>
-          </a:effectRef>
-          <a:fontRef idx="minor">
-            <a:schemeClr val="lt1"/>
-          </a:fontRef>
-        </p:style>
-        <p:txBody>
-          <a:bodyPr rtlCol="0" anchor="ctr"/>
-          <a:lstStyle/>
-          <a:p>
-            <a:pPr algn="ctr"/>
-            <a:endParaRPr lang="en-US"/>
-          </a:p>
-        </p:txBody>
-      </p:sp>
-      <p:pic>
-        <p:nvPicPr>
-          <p:cNvPr id="3" name="Picture 2">
-            <a:extLst>
-              <a:ext uri="{FF2B5EF4-FFF2-40B4-BE49-F238E27FC236}">
-                <a16:creationId xmlns:a16="http://schemas.microsoft.com/office/drawing/2014/main" id="{5D81D53A-C316-35AF-9E7C-30BC3880A098}"/>
-              </a:ext>
-            </a:extLst>
-          </p:cNvPr>
-          <p:cNvPicPr>
-            <a:picLocks noChangeAspect="1"/>
-          </p:cNvPicPr>
-          <p:nvPr/>
-        </p:nvPicPr>
-        <p:blipFill>
-          <a:blip r:embed="rId2"/>
-          <a:stretch>
-            <a:fillRect/>
-          </a:stretch>
-        </p:blipFill>
-        <p:spPr>
-          <a:xfrm>
-            <a:off x="2464748" y="796343"/>
-            <a:ext cx="7262503" cy="5265315"/>
-          </a:xfrm>
-          <a:prstGeom prst="rect">
-            <a:avLst/>
-          </a:prstGeom>
-        </p:spPr>
-      </p:pic>
-    </p:spTree>
-    <p:extLst>
-      <p:ext uri="{BB962C8B-B14F-4D97-AF65-F5344CB8AC3E}">
-        <p14:creationId xmlns:p14="http://schemas.microsoft.com/office/powerpoint/2010/main" val="1084251401"/>
-      </p:ext>
-    </p:extLst>
-  </p:cSld>
-  <p:clrMapOvr>
-    <a:masterClrMapping/>
-  </p:clrMapOvr>
-</p:sld>
-</file>
-
-<file path=ppt/slides/slide56.xml><?xml version="1.0" encoding="utf-8"?>
-<p:sld xmlns:a="http://schemas.openxmlformats.org/drawingml/2006/main" xmlns:r="http://schemas.openxmlformats.org/officeDocument/2006/relationships" xmlns:p="http://schemas.openxmlformats.org/presentationml/2006/main">
-  <p:cSld>
-    <p:spTree>
-      <p:nvGrpSpPr>
-        <p:cNvPr id="1" name=""/>
-        <p:cNvGrpSpPr/>
-        <p:nvPr/>
-      </p:nvGrpSpPr>
-      <p:grpSpPr>
-        <a:xfrm>
-          <a:off x="0" y="0"/>
-          <a:ext cx="0" cy="0"/>
-          <a:chOff x="0" y="0"/>
-          <a:chExt cx="0" cy="0"/>
-        </a:xfrm>
-      </p:grpSpPr>
-      <p:sp>
-        <p:nvSpPr>
-          <p:cNvPr id="2" name="Title 1">
-            <a:extLst>
-              <a:ext uri="{FF2B5EF4-FFF2-40B4-BE49-F238E27FC236}">
-                <a16:creationId xmlns:a16="http://schemas.microsoft.com/office/drawing/2014/main" id="{5152D553-BA5D-4ADF-4DC8-638CF07B4AD5}"/>
-              </a:ext>
-            </a:extLst>
-          </p:cNvPr>
-          <p:cNvSpPr>
-            <a:spLocks noGrp="1"/>
-          </p:cNvSpPr>
-          <p:nvPr>
-            <p:ph type="title"/>
-          </p:nvPr>
-        </p:nvSpPr>
-        <p:spPr/>
-        <p:txBody>
-          <a:bodyPr>
-            <a:noAutofit/>
-          </a:bodyPr>
-          <a:lstStyle/>
-          <a:p>
-            <a:r>
-              <a:rPr lang="en-US" sz="3200" dirty="0"/>
-              <a:t>Jang et al. (2019) - </a:t>
-            </a:r>
-            <a:r>
-              <a:rPr lang="en-CA" sz="3200" b="1" dirty="0"/>
-              <a:t>Word2vec convolutional neural networks for classification of news articles and tweets</a:t>
-            </a:r>
-            <a:endParaRPr lang="en-US" sz="3200" dirty="0"/>
-          </a:p>
-        </p:txBody>
-      </p:sp>
-      <p:pic>
-        <p:nvPicPr>
-          <p:cNvPr id="4" name="Picture 3">
-            <a:extLst>
-              <a:ext uri="{FF2B5EF4-FFF2-40B4-BE49-F238E27FC236}">
-                <a16:creationId xmlns:a16="http://schemas.microsoft.com/office/drawing/2014/main" id="{1F347013-F7DB-6BD2-27FE-F11A173711F6}"/>
-              </a:ext>
-            </a:extLst>
-          </p:cNvPr>
-          <p:cNvPicPr>
-            <a:picLocks noChangeAspect="1"/>
-          </p:cNvPicPr>
-          <p:nvPr/>
-        </p:nvPicPr>
-        <p:blipFill>
-          <a:blip r:embed="rId2"/>
-          <a:stretch>
-            <a:fillRect/>
-          </a:stretch>
-        </p:blipFill>
-        <p:spPr>
-          <a:xfrm>
-            <a:off x="2746002" y="2312779"/>
-            <a:ext cx="6699996" cy="3716959"/>
-          </a:xfrm>
-          <a:prstGeom prst="rect">
-            <a:avLst/>
-          </a:prstGeom>
-        </p:spPr>
-      </p:pic>
-    </p:spTree>
-    <p:extLst>
-      <p:ext uri="{BB962C8B-B14F-4D97-AF65-F5344CB8AC3E}">
-        <p14:creationId xmlns:p14="http://schemas.microsoft.com/office/powerpoint/2010/main" val="3945984817"/>
-      </p:ext>
-    </p:extLst>
-  </p:cSld>
-  <p:clrMapOvr>
-    <a:masterClrMapping/>
-  </p:clrMapOvr>
-</p:sld>
-</file>
-
-<file path=ppt/slides/slide57.xml><?xml version="1.0" encoding="utf-8"?>
-<p:sld xmlns:a="http://schemas.openxmlformats.org/drawingml/2006/main" xmlns:r="http://schemas.openxmlformats.org/officeDocument/2006/relationships" xmlns:p="http://schemas.openxmlformats.org/presentationml/2006/main">
-  <p:cSld>
-    <p:bg>
-      <p:bgPr>
-        <a:solidFill>
-          <a:schemeClr val="bg2"/>
-        </a:solidFill>
-        <a:effectLst/>
-      </p:bgPr>
-    </p:bg>
-    <p:spTree>
-      <p:nvGrpSpPr>
-        <p:cNvPr id="1" name=""/>
-        <p:cNvGrpSpPr/>
-        <p:nvPr/>
-      </p:nvGrpSpPr>
-      <p:grpSpPr>
-        <a:xfrm>
-          <a:off x="0" y="0"/>
-          <a:ext cx="0" cy="0"/>
-          <a:chOff x="0" y="0"/>
-          <a:chExt cx="0" cy="0"/>
-        </a:xfrm>
-      </p:grpSpPr>
-      <p:sp>
-        <p:nvSpPr>
-          <p:cNvPr id="8" name="Rectangle 7">
-            <a:extLst>
-              <a:ext uri="{FF2B5EF4-FFF2-40B4-BE49-F238E27FC236}">
-                <a16:creationId xmlns:a16="http://schemas.microsoft.com/office/drawing/2014/main" id="{CE606343-BADE-4565-AB89-E9EF7E253F80}"/>
-              </a:ext>
-              <a:ext uri="{C183D7F6-B498-43B3-948B-1728B52AA6E4}">
-                <adec:decorative xmlns:adec="http://schemas.microsoft.com/office/drawing/2017/decorative" val="1"/>
-              </a:ext>
-            </a:extLst>
-          </p:cNvPr>
-          <p:cNvSpPr>
-            <a:spLocks noGrp="1" noRot="1" noChangeAspect="1" noMove="1" noResize="1" noEditPoints="1" noAdjustHandles="1" noChangeArrowheads="1" noChangeShapeType="1" noTextEdit="1"/>
-          </p:cNvSpPr>
-          <p:nvPr>
-            <p:extLst>
-              <p:ext uri="{386F3935-93C4-4BCD-93E2-E3B085C9AB24}">
-                <p16:designElem xmlns:p16="http://schemas.microsoft.com/office/powerpoint/2015/main" val="1"/>
-              </p:ext>
-            </p:extLst>
-          </p:nvPr>
-        </p:nvSpPr>
-        <p:spPr>
-          <a:xfrm>
-            <a:off x="0" y="0"/>
-            <a:ext cx="12192000" cy="6858000"/>
-          </a:xfrm>
-          <a:prstGeom prst="rect">
-            <a:avLst/>
-          </a:prstGeom>
-          <a:solidFill>
-            <a:srgbClr val="786B4D"/>
-          </a:solidFill>
-          <a:ln>
-            <a:noFill/>
-          </a:ln>
-        </p:spPr>
-        <p:style>
-          <a:lnRef idx="2">
-            <a:schemeClr val="accent1">
-              <a:shade val="50000"/>
-            </a:schemeClr>
-          </a:lnRef>
-          <a:fillRef idx="1">
-            <a:schemeClr val="accent1"/>
-          </a:fillRef>
-          <a:effectRef idx="0">
-            <a:schemeClr val="accent1"/>
-          </a:effectRef>
-          <a:fontRef idx="minor">
-            <a:schemeClr val="lt1"/>
-          </a:fontRef>
-        </p:style>
-        <p:txBody>
-          <a:bodyPr rtlCol="0" anchor="ctr"/>
-          <a:lstStyle/>
-          <a:p>
-            <a:pPr algn="ctr"/>
-            <a:endParaRPr lang="en-US"/>
-          </a:p>
-        </p:txBody>
-      </p:sp>
-      <p:sp>
-        <p:nvSpPr>
-          <p:cNvPr id="10" name="Rectangle 9">
-            <a:extLst>
-              <a:ext uri="{FF2B5EF4-FFF2-40B4-BE49-F238E27FC236}">
-                <a16:creationId xmlns:a16="http://schemas.microsoft.com/office/drawing/2014/main" id="{39E183BD-2932-401F-8B53-E247764B376B}"/>
-              </a:ext>
-              <a:ext uri="{C183D7F6-B498-43B3-948B-1728B52AA6E4}">
-                <adec:decorative xmlns:adec="http://schemas.microsoft.com/office/drawing/2017/decorative" val="1"/>
-              </a:ext>
-            </a:extLst>
-          </p:cNvPr>
-          <p:cNvSpPr>
-            <a:spLocks noGrp="1" noRot="1" noChangeAspect="1" noMove="1" noResize="1" noEditPoints="1" noAdjustHandles="1" noChangeArrowheads="1" noChangeShapeType="1" noTextEdit="1"/>
-          </p:cNvSpPr>
-          <p:nvPr>
-            <p:extLst>
-              <p:ext uri="{386F3935-93C4-4BCD-93E2-E3B085C9AB24}">
-                <p16:designElem xmlns:p16="http://schemas.microsoft.com/office/powerpoint/2015/main" val="1"/>
-              </p:ext>
-            </p:extLst>
-          </p:nvPr>
-        </p:nvSpPr>
-        <p:spPr>
-          <a:xfrm>
-            <a:off x="477012" y="480060"/>
-            <a:ext cx="11237976" cy="5897880"/>
-          </a:xfrm>
-          <a:prstGeom prst="rect">
-            <a:avLst/>
-          </a:prstGeom>
-          <a:solidFill>
-            <a:srgbClr val="FFFFFF"/>
-          </a:solidFill>
-          <a:ln>
-            <a:noFill/>
-          </a:ln>
-        </p:spPr>
-        <p:style>
-          <a:lnRef idx="2">
-            <a:schemeClr val="accent1">
-              <a:shade val="50000"/>
-            </a:schemeClr>
-          </a:lnRef>
-          <a:fillRef idx="1">
-            <a:schemeClr val="accent1"/>
-          </a:fillRef>
-          <a:effectRef idx="0">
-            <a:schemeClr val="accent1"/>
-          </a:effectRef>
-          <a:fontRef idx="minor">
-            <a:schemeClr val="lt1"/>
-          </a:fontRef>
-        </p:style>
-        <p:txBody>
-          <a:bodyPr rtlCol="0" anchor="ctr"/>
-          <a:lstStyle/>
-          <a:p>
-            <a:pPr algn="ctr"/>
-            <a:endParaRPr lang="en-US"/>
-          </a:p>
-        </p:txBody>
-      </p:sp>
-      <p:pic>
-        <p:nvPicPr>
-          <p:cNvPr id="3" name="Picture 2">
-            <a:extLst>
-              <a:ext uri="{FF2B5EF4-FFF2-40B4-BE49-F238E27FC236}">
-                <a16:creationId xmlns:a16="http://schemas.microsoft.com/office/drawing/2014/main" id="{EC1CB839-5334-724B-6525-04AA1F6DC1E9}"/>
-              </a:ext>
-            </a:extLst>
-          </p:cNvPr>
-          <p:cNvPicPr>
-            <a:picLocks noChangeAspect="1" noChangeArrowheads="1"/>
-          </p:cNvPicPr>
-          <p:nvPr/>
-        </p:nvPicPr>
-        <p:blipFill>
-          <a:blip r:embed="rId2">
-            <a:extLst>
-              <a:ext uri="{28A0092B-C50C-407E-A947-70E740481C1C}">
-                <a14:useLocalDpi xmlns:a14="http://schemas.microsoft.com/office/drawing/2010/main" val="0"/>
-              </a:ext>
-            </a:extLst>
-          </a:blip>
-          <a:stretch>
-            <a:fillRect/>
-          </a:stretch>
-        </p:blipFill>
-        <p:spPr bwMode="auto">
-          <a:xfrm>
-            <a:off x="802335" y="1682090"/>
-            <a:ext cx="10587330" cy="3493821"/>
-          </a:xfrm>
-          <a:prstGeom prst="rect">
-            <a:avLst/>
-          </a:prstGeom>
-          <a:noFill/>
-          <a:extLst>
-            <a:ext uri="{909E8E84-426E-40DD-AFC4-6F175D3DCCD1}">
-              <a14:hiddenFill xmlns:a14="http://schemas.microsoft.com/office/drawing/2010/main">
-                <a:solidFill>
-                  <a:srgbClr val="FFFFFF"/>
-                </a:solidFill>
-              </a14:hiddenFill>
-            </a:ext>
-          </a:extLst>
-        </p:spPr>
-      </p:pic>
-    </p:spTree>
-    <p:extLst>
-      <p:ext uri="{BB962C8B-B14F-4D97-AF65-F5344CB8AC3E}">
-        <p14:creationId xmlns:p14="http://schemas.microsoft.com/office/powerpoint/2010/main" val="2522502800"/>
-      </p:ext>
-    </p:extLst>
-  </p:cSld>
-  <p:clrMapOvr>
-    <a:masterClrMapping/>
-  </p:clrMapOvr>
-</p:sld>
-</file>
-
-<file path=ppt/slides/slide58.xml><?xml version="1.0" encoding="utf-8"?>
-<p:sld xmlns:a="http://schemas.openxmlformats.org/drawingml/2006/main" xmlns:r="http://schemas.openxmlformats.org/officeDocument/2006/relationships" xmlns:p="http://schemas.openxmlformats.org/presentationml/2006/main">
-  <p:cSld>
-    <p:bg>
-      <p:bgPr>
-        <a:solidFill>
-          <a:schemeClr val="bg2"/>
-        </a:solidFill>
-        <a:effectLst/>
-      </p:bgPr>
-    </p:bg>
-    <p:spTree>
-      <p:nvGrpSpPr>
-        <p:cNvPr id="1" name=""/>
-        <p:cNvGrpSpPr/>
-        <p:nvPr/>
-      </p:nvGrpSpPr>
-      <p:grpSpPr>
-        <a:xfrm>
-          <a:off x="0" y="0"/>
-          <a:ext cx="0" cy="0"/>
-          <a:chOff x="0" y="0"/>
-          <a:chExt cx="0" cy="0"/>
-        </a:xfrm>
-      </p:grpSpPr>
-      <p:sp>
-        <p:nvSpPr>
-          <p:cNvPr id="7" name="Rectangle 6">
-            <a:extLst>
-              <a:ext uri="{FF2B5EF4-FFF2-40B4-BE49-F238E27FC236}">
-                <a16:creationId xmlns:a16="http://schemas.microsoft.com/office/drawing/2014/main" id="{CE606343-BADE-4565-AB89-E9EF7E253F80}"/>
-              </a:ext>
-              <a:ext uri="{C183D7F6-B498-43B3-948B-1728B52AA6E4}">
-                <adec:decorative xmlns:adec="http://schemas.microsoft.com/office/drawing/2017/decorative" val="1"/>
-              </a:ext>
-            </a:extLst>
-          </p:cNvPr>
-          <p:cNvSpPr>
-            <a:spLocks noGrp="1" noRot="1" noChangeAspect="1" noMove="1" noResize="1" noEditPoints="1" noAdjustHandles="1" noChangeArrowheads="1" noChangeShapeType="1" noTextEdit="1"/>
-          </p:cNvSpPr>
-          <p:nvPr>
-            <p:extLst>
-              <p:ext uri="{386F3935-93C4-4BCD-93E2-E3B085C9AB24}">
-                <p16:designElem xmlns:p16="http://schemas.microsoft.com/office/powerpoint/2015/main" val="1"/>
-              </p:ext>
-            </p:extLst>
-          </p:nvPr>
-        </p:nvSpPr>
-        <p:spPr>
-          <a:xfrm>
-            <a:off x="0" y="0"/>
-            <a:ext cx="12192000" cy="6858000"/>
-          </a:xfrm>
-          <a:prstGeom prst="rect">
-            <a:avLst/>
-          </a:prstGeom>
-          <a:solidFill>
-            <a:schemeClr val="tx1">
-              <a:lumMod val="65000"/>
-              <a:lumOff val="35000"/>
-            </a:schemeClr>
-          </a:solidFill>
-          <a:ln>
-            <a:noFill/>
-          </a:ln>
-        </p:spPr>
-        <p:style>
-          <a:lnRef idx="2">
-            <a:schemeClr val="accent1">
-              <a:shade val="50000"/>
-            </a:schemeClr>
-          </a:lnRef>
-          <a:fillRef idx="1">
-            <a:schemeClr val="accent1"/>
-          </a:fillRef>
-          <a:effectRef idx="0">
-            <a:schemeClr val="accent1"/>
-          </a:effectRef>
-          <a:fontRef idx="minor">
-            <a:schemeClr val="lt1"/>
-          </a:fontRef>
-        </p:style>
-        <p:txBody>
-          <a:bodyPr rtlCol="0" anchor="ctr"/>
-          <a:lstStyle/>
-          <a:p>
-            <a:pPr algn="ctr"/>
-            <a:endParaRPr lang="en-US"/>
-          </a:p>
-        </p:txBody>
-      </p:sp>
-      <p:sp>
-        <p:nvSpPr>
-          <p:cNvPr id="9" name="Rectangle 8">
-            <a:extLst>
-              <a:ext uri="{FF2B5EF4-FFF2-40B4-BE49-F238E27FC236}">
-                <a16:creationId xmlns:a16="http://schemas.microsoft.com/office/drawing/2014/main" id="{39E183BD-2932-401F-8B53-E247764B376B}"/>
-              </a:ext>
-              <a:ext uri="{C183D7F6-B498-43B3-948B-1728B52AA6E4}">
-                <adec:decorative xmlns:adec="http://schemas.microsoft.com/office/drawing/2017/decorative" val="1"/>
-              </a:ext>
-            </a:extLst>
-          </p:cNvPr>
-          <p:cNvSpPr>
-            <a:spLocks noGrp="1" noRot="1" noChangeAspect="1" noMove="1" noResize="1" noEditPoints="1" noAdjustHandles="1" noChangeArrowheads="1" noChangeShapeType="1" noTextEdit="1"/>
-          </p:cNvSpPr>
-          <p:nvPr>
-            <p:extLst>
-              <p:ext uri="{386F3935-93C4-4BCD-93E2-E3B085C9AB24}">
-                <p16:designElem xmlns:p16="http://schemas.microsoft.com/office/powerpoint/2015/main" val="1"/>
-              </p:ext>
-            </p:extLst>
-          </p:nvPr>
-        </p:nvSpPr>
-        <p:spPr>
-          <a:xfrm>
-            <a:off x="477012" y="480060"/>
-            <a:ext cx="11237976" cy="5897880"/>
-          </a:xfrm>
-          <a:prstGeom prst="rect">
-            <a:avLst/>
-          </a:prstGeom>
-          <a:solidFill>
-            <a:srgbClr val="FFFFFF"/>
-          </a:solidFill>
-          <a:ln>
-            <a:noFill/>
-          </a:ln>
-        </p:spPr>
-        <p:style>
-          <a:lnRef idx="2">
-            <a:schemeClr val="accent1">
-              <a:shade val="50000"/>
-            </a:schemeClr>
-          </a:lnRef>
-          <a:fillRef idx="1">
-            <a:schemeClr val="accent1"/>
-          </a:fillRef>
-          <a:effectRef idx="0">
-            <a:schemeClr val="accent1"/>
-          </a:effectRef>
-          <a:fontRef idx="minor">
-            <a:schemeClr val="lt1"/>
-          </a:fontRef>
-        </p:style>
-        <p:txBody>
-          <a:bodyPr rtlCol="0" anchor="ctr"/>
-          <a:lstStyle/>
-          <a:p>
-            <a:pPr algn="ctr"/>
-            <a:endParaRPr lang="en-US"/>
-          </a:p>
-        </p:txBody>
-      </p:sp>
-      <p:pic>
-        <p:nvPicPr>
-          <p:cNvPr id="2" name="Picture 2">
-            <a:extLst>
-              <a:ext uri="{FF2B5EF4-FFF2-40B4-BE49-F238E27FC236}">
-                <a16:creationId xmlns:a16="http://schemas.microsoft.com/office/drawing/2014/main" id="{89DF4552-1850-7123-2602-14E372425C5E}"/>
-              </a:ext>
-            </a:extLst>
-          </p:cNvPr>
-          <p:cNvPicPr>
-            <a:picLocks noChangeAspect="1" noChangeArrowheads="1"/>
-          </p:cNvPicPr>
-          <p:nvPr/>
-        </p:nvPicPr>
-        <p:blipFill>
-          <a:blip r:embed="rId2">
-            <a:extLst>
-              <a:ext uri="{28A0092B-C50C-407E-A947-70E740481C1C}">
-                <a14:useLocalDpi xmlns:a14="http://schemas.microsoft.com/office/drawing/2010/main" val="0"/>
-              </a:ext>
-            </a:extLst>
-          </a:blip>
-          <a:stretch>
-            <a:fillRect/>
-          </a:stretch>
-        </p:blipFill>
-        <p:spPr bwMode="auto">
-          <a:xfrm>
-            <a:off x="802335" y="2436440"/>
-            <a:ext cx="10587330" cy="1985121"/>
-          </a:xfrm>
-          <a:prstGeom prst="rect">
-            <a:avLst/>
-          </a:prstGeom>
-          <a:noFill/>
-          <a:extLst>
-            <a:ext uri="{909E8E84-426E-40DD-AFC4-6F175D3DCCD1}">
-              <a14:hiddenFill xmlns:a14="http://schemas.microsoft.com/office/drawing/2010/main">
-                <a:solidFill>
-                  <a:srgbClr val="FFFFFF"/>
-                </a:solidFill>
-              </a14:hiddenFill>
-            </a:ext>
-          </a:extLst>
-        </p:spPr>
-      </p:pic>
-    </p:spTree>
-    <p:extLst>
-      <p:ext uri="{BB962C8B-B14F-4D97-AF65-F5344CB8AC3E}">
-        <p14:creationId xmlns:p14="http://schemas.microsoft.com/office/powerpoint/2010/main" val="2097083421"/>
-      </p:ext>
-    </p:extLst>
-  </p:cSld>
-  <p:clrMapOvr>
-    <a:masterClrMapping/>
-  </p:clrMapOvr>
-</p:sld>
-</file>
-
-<file path=ppt/slides/slide59.xml><?xml version="1.0" encoding="utf-8"?>
-<p:sld xmlns:a="http://schemas.openxmlformats.org/drawingml/2006/main" xmlns:r="http://schemas.openxmlformats.org/officeDocument/2006/relationships" xmlns:p="http://schemas.openxmlformats.org/presentationml/2006/main">
-  <p:cSld>
-    <p:spTree>
-      <p:nvGrpSpPr>
-        <p:cNvPr id="1" name=""/>
-        <p:cNvGrpSpPr/>
-        <p:nvPr/>
-      </p:nvGrpSpPr>
-      <p:grpSpPr>
-        <a:xfrm>
-          <a:off x="0" y="0"/>
-          <a:ext cx="0" cy="0"/>
-          <a:chOff x="0" y="0"/>
-          <a:chExt cx="0" cy="0"/>
-        </a:xfrm>
-      </p:grpSpPr>
-      <p:sp>
-        <p:nvSpPr>
-          <p:cNvPr id="2" name="Title 1">
-            <a:extLst>
-              <a:ext uri="{FF2B5EF4-FFF2-40B4-BE49-F238E27FC236}">
-                <a16:creationId xmlns:a16="http://schemas.microsoft.com/office/drawing/2014/main" id="{D596AE00-F8B4-69B9-C643-7B5311FB3154}"/>
-              </a:ext>
-            </a:extLst>
-          </p:cNvPr>
-          <p:cNvSpPr>
-            <a:spLocks noGrp="1"/>
-          </p:cNvSpPr>
-          <p:nvPr>
-            <p:ph type="title"/>
-          </p:nvPr>
-        </p:nvSpPr>
-        <p:spPr/>
-        <p:txBody>
-          <a:bodyPr/>
-          <a:lstStyle/>
-          <a:p>
-            <a:r>
-              <a:rPr lang="en-US" dirty="0"/>
-              <a:t>How can we use it? /</a:t>
-            </a:r>
-            <a:br>
-              <a:rPr lang="en-US" dirty="0"/>
-            </a:br>
-            <a:r>
-              <a:rPr lang="en-US" dirty="0"/>
-              <a:t>Why should we care?</a:t>
-            </a:r>
-          </a:p>
-        </p:txBody>
-      </p:sp>
-      <p:sp>
-        <p:nvSpPr>
-          <p:cNvPr id="3" name="Content Placeholder 2">
-            <a:extLst>
-              <a:ext uri="{FF2B5EF4-FFF2-40B4-BE49-F238E27FC236}">
-                <a16:creationId xmlns:a16="http://schemas.microsoft.com/office/drawing/2014/main" id="{24FFD176-FC2D-DED5-57AE-DC8593F090BD}"/>
-              </a:ext>
-            </a:extLst>
-          </p:cNvPr>
-          <p:cNvSpPr>
-            <a:spLocks noGrp="1"/>
-          </p:cNvSpPr>
-          <p:nvPr>
-            <p:ph idx="1"/>
-          </p:nvPr>
-        </p:nvSpPr>
-        <p:spPr/>
-        <p:txBody>
-          <a:bodyPr/>
-          <a:lstStyle/>
-          <a:p>
-            <a:r>
-              <a:rPr lang="en-US" dirty="0"/>
-              <a:t>There are two general uses for word embeddings:</a:t>
-            </a:r>
-          </a:p>
-          <a:p>
-            <a:pPr lvl="1"/>
-            <a:r>
-              <a:rPr lang="en-US" dirty="0"/>
-              <a:t>Use the (variation in the) position of words in relation to each other to make inferences about meaning, ideology, biases, etc. (i.e., unsupervised learning)</a:t>
-            </a:r>
-          </a:p>
-          <a:p>
-            <a:pPr lvl="1"/>
-            <a:r>
-              <a:rPr lang="en-US" dirty="0"/>
-              <a:t>Use pre-trained word embeddings to predict categories in text (i.e., supervised learning)</a:t>
-            </a:r>
-          </a:p>
-          <a:p>
-            <a:pPr lvl="1"/>
-            <a:endParaRPr lang="en-US" dirty="0"/>
-          </a:p>
-          <a:p>
-            <a:r>
-              <a:rPr lang="en-US" dirty="0">
-                <a:highlight>
-                  <a:srgbClr val="FFFF00"/>
-                </a:highlight>
-              </a:rPr>
-              <a:t>But what if we could get EVEN BETTER representations?</a:t>
-            </a:r>
-          </a:p>
-        </p:txBody>
-      </p:sp>
-    </p:spTree>
-    <p:extLst>
-      <p:ext uri="{BB962C8B-B14F-4D97-AF65-F5344CB8AC3E}">
-        <p14:creationId xmlns:p14="http://schemas.microsoft.com/office/powerpoint/2010/main" val="802978037"/>
       </p:ext>
     </p:extLst>
   </p:cSld>
@@ -25425,6 +25198,842 @@
     <p:extLst>
       <p:ext uri="{BB962C8B-B14F-4D97-AF65-F5344CB8AC3E}">
         <p14:creationId xmlns:p14="http://schemas.microsoft.com/office/powerpoint/2010/main" val="3972061486"/>
+      </p:ext>
+    </p:extLst>
+  </p:cSld>
+  <p:clrMapOvr>
+    <a:masterClrMapping/>
+  </p:clrMapOvr>
+</p:sld>
+</file>
+
+<file path=ppt/slides/slide60.xml><?xml version="1.0" encoding="utf-8"?>
+<p:sld xmlns:a="http://schemas.openxmlformats.org/drawingml/2006/main" xmlns:r="http://schemas.openxmlformats.org/officeDocument/2006/relationships" xmlns:p="http://schemas.openxmlformats.org/presentationml/2006/main">
+  <p:cSld>
+    <p:bg>
+      <p:bgPr>
+        <a:solidFill>
+          <a:schemeClr val="bg2"/>
+        </a:solidFill>
+        <a:effectLst/>
+      </p:bgPr>
+    </p:bg>
+    <p:spTree>
+      <p:nvGrpSpPr>
+        <p:cNvPr id="1" name=""/>
+        <p:cNvGrpSpPr/>
+        <p:nvPr/>
+      </p:nvGrpSpPr>
+      <p:grpSpPr>
+        <a:xfrm>
+          <a:off x="0" y="0"/>
+          <a:ext cx="0" cy="0"/>
+          <a:chOff x="0" y="0"/>
+          <a:chExt cx="0" cy="0"/>
+        </a:xfrm>
+      </p:grpSpPr>
+      <p:sp>
+        <p:nvSpPr>
+          <p:cNvPr id="8" name="Rectangle 7">
+            <a:extLst>
+              <a:ext uri="{FF2B5EF4-FFF2-40B4-BE49-F238E27FC236}">
+                <a16:creationId xmlns:a16="http://schemas.microsoft.com/office/drawing/2014/main" id="{CE606343-BADE-4565-AB89-E9EF7E253F80}"/>
+              </a:ext>
+              <a:ext uri="{C183D7F6-B498-43B3-948B-1728B52AA6E4}">
+                <adec:decorative xmlns:adec="http://schemas.microsoft.com/office/drawing/2017/decorative" val="1"/>
+              </a:ext>
+            </a:extLst>
+          </p:cNvPr>
+          <p:cNvSpPr>
+            <a:spLocks noGrp="1" noRot="1" noChangeAspect="1" noMove="1" noResize="1" noEditPoints="1" noAdjustHandles="1" noChangeArrowheads="1" noChangeShapeType="1" noTextEdit="1"/>
+          </p:cNvSpPr>
+          <p:nvPr>
+            <p:extLst>
+              <p:ext uri="{386F3935-93C4-4BCD-93E2-E3B085C9AB24}">
+                <p16:designElem xmlns:p16="http://schemas.microsoft.com/office/powerpoint/2015/main" val="1"/>
+              </p:ext>
+            </p:extLst>
+          </p:nvPr>
+        </p:nvSpPr>
+        <p:spPr>
+          <a:xfrm>
+            <a:off x="0" y="0"/>
+            <a:ext cx="12192000" cy="6858000"/>
+          </a:xfrm>
+          <a:prstGeom prst="rect">
+            <a:avLst/>
+          </a:prstGeom>
+          <a:solidFill>
+            <a:schemeClr val="tx1">
+              <a:lumMod val="65000"/>
+              <a:lumOff val="35000"/>
+            </a:schemeClr>
+          </a:solidFill>
+          <a:ln>
+            <a:noFill/>
+          </a:ln>
+        </p:spPr>
+        <p:style>
+          <a:lnRef idx="2">
+            <a:schemeClr val="accent1">
+              <a:shade val="50000"/>
+            </a:schemeClr>
+          </a:lnRef>
+          <a:fillRef idx="1">
+            <a:schemeClr val="accent1"/>
+          </a:fillRef>
+          <a:effectRef idx="0">
+            <a:schemeClr val="accent1"/>
+          </a:effectRef>
+          <a:fontRef idx="minor">
+            <a:schemeClr val="lt1"/>
+          </a:fontRef>
+        </p:style>
+        <p:txBody>
+          <a:bodyPr rtlCol="0" anchor="ctr"/>
+          <a:lstStyle/>
+          <a:p>
+            <a:pPr algn="ctr"/>
+            <a:endParaRPr lang="en-US"/>
+          </a:p>
+        </p:txBody>
+      </p:sp>
+      <p:sp>
+        <p:nvSpPr>
+          <p:cNvPr id="10" name="Rectangle 9">
+            <a:extLst>
+              <a:ext uri="{FF2B5EF4-FFF2-40B4-BE49-F238E27FC236}">
+                <a16:creationId xmlns:a16="http://schemas.microsoft.com/office/drawing/2014/main" id="{39E183BD-2932-401F-8B53-E247764B376B}"/>
+              </a:ext>
+              <a:ext uri="{C183D7F6-B498-43B3-948B-1728B52AA6E4}">
+                <adec:decorative xmlns:adec="http://schemas.microsoft.com/office/drawing/2017/decorative" val="1"/>
+              </a:ext>
+            </a:extLst>
+          </p:cNvPr>
+          <p:cNvSpPr>
+            <a:spLocks noGrp="1" noRot="1" noChangeAspect="1" noMove="1" noResize="1" noEditPoints="1" noAdjustHandles="1" noChangeArrowheads="1" noChangeShapeType="1" noTextEdit="1"/>
+          </p:cNvSpPr>
+          <p:nvPr>
+            <p:extLst>
+              <p:ext uri="{386F3935-93C4-4BCD-93E2-E3B085C9AB24}">
+                <p16:designElem xmlns:p16="http://schemas.microsoft.com/office/powerpoint/2015/main" val="1"/>
+              </p:ext>
+            </p:extLst>
+          </p:nvPr>
+        </p:nvSpPr>
+        <p:spPr>
+          <a:xfrm>
+            <a:off x="477012" y="480060"/>
+            <a:ext cx="11237976" cy="5897880"/>
+          </a:xfrm>
+          <a:prstGeom prst="rect">
+            <a:avLst/>
+          </a:prstGeom>
+          <a:solidFill>
+            <a:srgbClr val="FFFFFF"/>
+          </a:solidFill>
+          <a:ln>
+            <a:noFill/>
+          </a:ln>
+        </p:spPr>
+        <p:style>
+          <a:lnRef idx="2">
+            <a:schemeClr val="accent1">
+              <a:shade val="50000"/>
+            </a:schemeClr>
+          </a:lnRef>
+          <a:fillRef idx="1">
+            <a:schemeClr val="accent1"/>
+          </a:fillRef>
+          <a:effectRef idx="0">
+            <a:schemeClr val="accent1"/>
+          </a:effectRef>
+          <a:fontRef idx="minor">
+            <a:schemeClr val="lt1"/>
+          </a:fontRef>
+        </p:style>
+        <p:txBody>
+          <a:bodyPr rtlCol="0" anchor="ctr"/>
+          <a:lstStyle/>
+          <a:p>
+            <a:pPr algn="ctr"/>
+            <a:endParaRPr lang="en-US"/>
+          </a:p>
+        </p:txBody>
+      </p:sp>
+      <p:pic>
+        <p:nvPicPr>
+          <p:cNvPr id="3" name="Picture 2">
+            <a:extLst>
+              <a:ext uri="{FF2B5EF4-FFF2-40B4-BE49-F238E27FC236}">
+                <a16:creationId xmlns:a16="http://schemas.microsoft.com/office/drawing/2014/main" id="{5D81D53A-C316-35AF-9E7C-30BC3880A098}"/>
+              </a:ext>
+            </a:extLst>
+          </p:cNvPr>
+          <p:cNvPicPr>
+            <a:picLocks noChangeAspect="1"/>
+          </p:cNvPicPr>
+          <p:nvPr/>
+        </p:nvPicPr>
+        <p:blipFill>
+          <a:blip r:embed="rId2"/>
+          <a:stretch>
+            <a:fillRect/>
+          </a:stretch>
+        </p:blipFill>
+        <p:spPr>
+          <a:xfrm>
+            <a:off x="2464748" y="796343"/>
+            <a:ext cx="7262503" cy="5265315"/>
+          </a:xfrm>
+          <a:prstGeom prst="rect">
+            <a:avLst/>
+          </a:prstGeom>
+        </p:spPr>
+      </p:pic>
+    </p:spTree>
+    <p:extLst>
+      <p:ext uri="{BB962C8B-B14F-4D97-AF65-F5344CB8AC3E}">
+        <p14:creationId xmlns:p14="http://schemas.microsoft.com/office/powerpoint/2010/main" val="1084251401"/>
+      </p:ext>
+    </p:extLst>
+  </p:cSld>
+  <p:clrMapOvr>
+    <a:masterClrMapping/>
+  </p:clrMapOvr>
+</p:sld>
+</file>
+
+<file path=ppt/slides/slide61.xml><?xml version="1.0" encoding="utf-8"?>
+<p:sld xmlns:a="http://schemas.openxmlformats.org/drawingml/2006/main" xmlns:r="http://schemas.openxmlformats.org/officeDocument/2006/relationships" xmlns:p="http://schemas.openxmlformats.org/presentationml/2006/main">
+  <p:cSld>
+    <p:spTree>
+      <p:nvGrpSpPr>
+        <p:cNvPr id="1" name=""/>
+        <p:cNvGrpSpPr/>
+        <p:nvPr/>
+      </p:nvGrpSpPr>
+      <p:grpSpPr>
+        <a:xfrm>
+          <a:off x="0" y="0"/>
+          <a:ext cx="0" cy="0"/>
+          <a:chOff x="0" y="0"/>
+          <a:chExt cx="0" cy="0"/>
+        </a:xfrm>
+      </p:grpSpPr>
+      <p:sp>
+        <p:nvSpPr>
+          <p:cNvPr id="2" name="Title 1">
+            <a:extLst>
+              <a:ext uri="{FF2B5EF4-FFF2-40B4-BE49-F238E27FC236}">
+                <a16:creationId xmlns:a16="http://schemas.microsoft.com/office/drawing/2014/main" id="{5152D553-BA5D-4ADF-4DC8-638CF07B4AD5}"/>
+              </a:ext>
+            </a:extLst>
+          </p:cNvPr>
+          <p:cNvSpPr>
+            <a:spLocks noGrp="1"/>
+          </p:cNvSpPr>
+          <p:nvPr>
+            <p:ph type="title"/>
+          </p:nvPr>
+        </p:nvSpPr>
+        <p:spPr/>
+        <p:txBody>
+          <a:bodyPr>
+            <a:noAutofit/>
+          </a:bodyPr>
+          <a:lstStyle/>
+          <a:p>
+            <a:r>
+              <a:rPr lang="en-US" sz="3200" dirty="0"/>
+              <a:t>Jang et al. (2019) - </a:t>
+            </a:r>
+            <a:r>
+              <a:rPr lang="en-CA" sz="3200" b="1" dirty="0"/>
+              <a:t>Word2vec convolutional neural networks for classification of news articles and tweets</a:t>
+            </a:r>
+            <a:endParaRPr lang="en-US" sz="3200" dirty="0"/>
+          </a:p>
+        </p:txBody>
+      </p:sp>
+      <p:pic>
+        <p:nvPicPr>
+          <p:cNvPr id="4" name="Picture 3">
+            <a:extLst>
+              <a:ext uri="{FF2B5EF4-FFF2-40B4-BE49-F238E27FC236}">
+                <a16:creationId xmlns:a16="http://schemas.microsoft.com/office/drawing/2014/main" id="{1F347013-F7DB-6BD2-27FE-F11A173711F6}"/>
+              </a:ext>
+            </a:extLst>
+          </p:cNvPr>
+          <p:cNvPicPr>
+            <a:picLocks noChangeAspect="1"/>
+          </p:cNvPicPr>
+          <p:nvPr/>
+        </p:nvPicPr>
+        <p:blipFill>
+          <a:blip r:embed="rId2"/>
+          <a:stretch>
+            <a:fillRect/>
+          </a:stretch>
+        </p:blipFill>
+        <p:spPr>
+          <a:xfrm>
+            <a:off x="2746002" y="2312779"/>
+            <a:ext cx="6699996" cy="3716959"/>
+          </a:xfrm>
+          <a:prstGeom prst="rect">
+            <a:avLst/>
+          </a:prstGeom>
+        </p:spPr>
+      </p:pic>
+    </p:spTree>
+    <p:extLst>
+      <p:ext uri="{BB962C8B-B14F-4D97-AF65-F5344CB8AC3E}">
+        <p14:creationId xmlns:p14="http://schemas.microsoft.com/office/powerpoint/2010/main" val="3945984817"/>
+      </p:ext>
+    </p:extLst>
+  </p:cSld>
+  <p:clrMapOvr>
+    <a:masterClrMapping/>
+  </p:clrMapOvr>
+</p:sld>
+</file>
+
+<file path=ppt/slides/slide62.xml><?xml version="1.0" encoding="utf-8"?>
+<p:sld xmlns:a="http://schemas.openxmlformats.org/drawingml/2006/main" xmlns:r="http://schemas.openxmlformats.org/officeDocument/2006/relationships" xmlns:p="http://schemas.openxmlformats.org/presentationml/2006/main">
+  <p:cSld>
+    <p:bg>
+      <p:bgPr>
+        <a:solidFill>
+          <a:schemeClr val="bg2"/>
+        </a:solidFill>
+        <a:effectLst/>
+      </p:bgPr>
+    </p:bg>
+    <p:spTree>
+      <p:nvGrpSpPr>
+        <p:cNvPr id="1" name=""/>
+        <p:cNvGrpSpPr/>
+        <p:nvPr/>
+      </p:nvGrpSpPr>
+      <p:grpSpPr>
+        <a:xfrm>
+          <a:off x="0" y="0"/>
+          <a:ext cx="0" cy="0"/>
+          <a:chOff x="0" y="0"/>
+          <a:chExt cx="0" cy="0"/>
+        </a:xfrm>
+      </p:grpSpPr>
+      <p:sp>
+        <p:nvSpPr>
+          <p:cNvPr id="8" name="Rectangle 7">
+            <a:extLst>
+              <a:ext uri="{FF2B5EF4-FFF2-40B4-BE49-F238E27FC236}">
+                <a16:creationId xmlns:a16="http://schemas.microsoft.com/office/drawing/2014/main" id="{CE606343-BADE-4565-AB89-E9EF7E253F80}"/>
+              </a:ext>
+              <a:ext uri="{C183D7F6-B498-43B3-948B-1728B52AA6E4}">
+                <adec:decorative xmlns:adec="http://schemas.microsoft.com/office/drawing/2017/decorative" val="1"/>
+              </a:ext>
+            </a:extLst>
+          </p:cNvPr>
+          <p:cNvSpPr>
+            <a:spLocks noGrp="1" noRot="1" noChangeAspect="1" noMove="1" noResize="1" noEditPoints="1" noAdjustHandles="1" noChangeArrowheads="1" noChangeShapeType="1" noTextEdit="1"/>
+          </p:cNvSpPr>
+          <p:nvPr>
+            <p:extLst>
+              <p:ext uri="{386F3935-93C4-4BCD-93E2-E3B085C9AB24}">
+                <p16:designElem xmlns:p16="http://schemas.microsoft.com/office/powerpoint/2015/main" val="1"/>
+              </p:ext>
+            </p:extLst>
+          </p:nvPr>
+        </p:nvSpPr>
+        <p:spPr>
+          <a:xfrm>
+            <a:off x="0" y="0"/>
+            <a:ext cx="12192000" cy="6858000"/>
+          </a:xfrm>
+          <a:prstGeom prst="rect">
+            <a:avLst/>
+          </a:prstGeom>
+          <a:solidFill>
+            <a:srgbClr val="786B4D"/>
+          </a:solidFill>
+          <a:ln>
+            <a:noFill/>
+          </a:ln>
+        </p:spPr>
+        <p:style>
+          <a:lnRef idx="2">
+            <a:schemeClr val="accent1">
+              <a:shade val="50000"/>
+            </a:schemeClr>
+          </a:lnRef>
+          <a:fillRef idx="1">
+            <a:schemeClr val="accent1"/>
+          </a:fillRef>
+          <a:effectRef idx="0">
+            <a:schemeClr val="accent1"/>
+          </a:effectRef>
+          <a:fontRef idx="minor">
+            <a:schemeClr val="lt1"/>
+          </a:fontRef>
+        </p:style>
+        <p:txBody>
+          <a:bodyPr rtlCol="0" anchor="ctr"/>
+          <a:lstStyle/>
+          <a:p>
+            <a:pPr algn="ctr"/>
+            <a:endParaRPr lang="en-US"/>
+          </a:p>
+        </p:txBody>
+      </p:sp>
+      <p:sp>
+        <p:nvSpPr>
+          <p:cNvPr id="10" name="Rectangle 9">
+            <a:extLst>
+              <a:ext uri="{FF2B5EF4-FFF2-40B4-BE49-F238E27FC236}">
+                <a16:creationId xmlns:a16="http://schemas.microsoft.com/office/drawing/2014/main" id="{39E183BD-2932-401F-8B53-E247764B376B}"/>
+              </a:ext>
+              <a:ext uri="{C183D7F6-B498-43B3-948B-1728B52AA6E4}">
+                <adec:decorative xmlns:adec="http://schemas.microsoft.com/office/drawing/2017/decorative" val="1"/>
+              </a:ext>
+            </a:extLst>
+          </p:cNvPr>
+          <p:cNvSpPr>
+            <a:spLocks noGrp="1" noRot="1" noChangeAspect="1" noMove="1" noResize="1" noEditPoints="1" noAdjustHandles="1" noChangeArrowheads="1" noChangeShapeType="1" noTextEdit="1"/>
+          </p:cNvSpPr>
+          <p:nvPr>
+            <p:extLst>
+              <p:ext uri="{386F3935-93C4-4BCD-93E2-E3B085C9AB24}">
+                <p16:designElem xmlns:p16="http://schemas.microsoft.com/office/powerpoint/2015/main" val="1"/>
+              </p:ext>
+            </p:extLst>
+          </p:nvPr>
+        </p:nvSpPr>
+        <p:spPr>
+          <a:xfrm>
+            <a:off x="477012" y="480060"/>
+            <a:ext cx="11237976" cy="5897880"/>
+          </a:xfrm>
+          <a:prstGeom prst="rect">
+            <a:avLst/>
+          </a:prstGeom>
+          <a:solidFill>
+            <a:srgbClr val="FFFFFF"/>
+          </a:solidFill>
+          <a:ln>
+            <a:noFill/>
+          </a:ln>
+        </p:spPr>
+        <p:style>
+          <a:lnRef idx="2">
+            <a:schemeClr val="accent1">
+              <a:shade val="50000"/>
+            </a:schemeClr>
+          </a:lnRef>
+          <a:fillRef idx="1">
+            <a:schemeClr val="accent1"/>
+          </a:fillRef>
+          <a:effectRef idx="0">
+            <a:schemeClr val="accent1"/>
+          </a:effectRef>
+          <a:fontRef idx="minor">
+            <a:schemeClr val="lt1"/>
+          </a:fontRef>
+        </p:style>
+        <p:txBody>
+          <a:bodyPr rtlCol="0" anchor="ctr"/>
+          <a:lstStyle/>
+          <a:p>
+            <a:pPr algn="ctr"/>
+            <a:endParaRPr lang="en-US"/>
+          </a:p>
+        </p:txBody>
+      </p:sp>
+      <p:pic>
+        <p:nvPicPr>
+          <p:cNvPr id="3" name="Picture 2">
+            <a:extLst>
+              <a:ext uri="{FF2B5EF4-FFF2-40B4-BE49-F238E27FC236}">
+                <a16:creationId xmlns:a16="http://schemas.microsoft.com/office/drawing/2014/main" id="{EC1CB839-5334-724B-6525-04AA1F6DC1E9}"/>
+              </a:ext>
+            </a:extLst>
+          </p:cNvPr>
+          <p:cNvPicPr>
+            <a:picLocks noChangeAspect="1" noChangeArrowheads="1"/>
+          </p:cNvPicPr>
+          <p:nvPr/>
+        </p:nvPicPr>
+        <p:blipFill>
+          <a:blip r:embed="rId2">
+            <a:extLst>
+              <a:ext uri="{28A0092B-C50C-407E-A947-70E740481C1C}">
+                <a14:useLocalDpi xmlns:a14="http://schemas.microsoft.com/office/drawing/2010/main" val="0"/>
+              </a:ext>
+            </a:extLst>
+          </a:blip>
+          <a:stretch>
+            <a:fillRect/>
+          </a:stretch>
+        </p:blipFill>
+        <p:spPr bwMode="auto">
+          <a:xfrm>
+            <a:off x="802335" y="1682090"/>
+            <a:ext cx="10587330" cy="3493821"/>
+          </a:xfrm>
+          <a:prstGeom prst="rect">
+            <a:avLst/>
+          </a:prstGeom>
+          <a:noFill/>
+          <a:extLst>
+            <a:ext uri="{909E8E84-426E-40DD-AFC4-6F175D3DCCD1}">
+              <a14:hiddenFill xmlns:a14="http://schemas.microsoft.com/office/drawing/2010/main">
+                <a:solidFill>
+                  <a:srgbClr val="FFFFFF"/>
+                </a:solidFill>
+              </a14:hiddenFill>
+            </a:ext>
+          </a:extLst>
+        </p:spPr>
+      </p:pic>
+    </p:spTree>
+    <p:extLst>
+      <p:ext uri="{BB962C8B-B14F-4D97-AF65-F5344CB8AC3E}">
+        <p14:creationId xmlns:p14="http://schemas.microsoft.com/office/powerpoint/2010/main" val="2522502800"/>
+      </p:ext>
+    </p:extLst>
+  </p:cSld>
+  <p:clrMapOvr>
+    <a:masterClrMapping/>
+  </p:clrMapOvr>
+</p:sld>
+</file>
+
+<file path=ppt/slides/slide63.xml><?xml version="1.0" encoding="utf-8"?>
+<p:sld xmlns:a="http://schemas.openxmlformats.org/drawingml/2006/main" xmlns:r="http://schemas.openxmlformats.org/officeDocument/2006/relationships" xmlns:p="http://schemas.openxmlformats.org/presentationml/2006/main">
+  <p:cSld>
+    <p:bg>
+      <p:bgPr>
+        <a:solidFill>
+          <a:schemeClr val="bg2"/>
+        </a:solidFill>
+        <a:effectLst/>
+      </p:bgPr>
+    </p:bg>
+    <p:spTree>
+      <p:nvGrpSpPr>
+        <p:cNvPr id="1" name=""/>
+        <p:cNvGrpSpPr/>
+        <p:nvPr/>
+      </p:nvGrpSpPr>
+      <p:grpSpPr>
+        <a:xfrm>
+          <a:off x="0" y="0"/>
+          <a:ext cx="0" cy="0"/>
+          <a:chOff x="0" y="0"/>
+          <a:chExt cx="0" cy="0"/>
+        </a:xfrm>
+      </p:grpSpPr>
+      <p:sp>
+        <p:nvSpPr>
+          <p:cNvPr id="7" name="Rectangle 6">
+            <a:extLst>
+              <a:ext uri="{FF2B5EF4-FFF2-40B4-BE49-F238E27FC236}">
+                <a16:creationId xmlns:a16="http://schemas.microsoft.com/office/drawing/2014/main" id="{CE606343-BADE-4565-AB89-E9EF7E253F80}"/>
+              </a:ext>
+              <a:ext uri="{C183D7F6-B498-43B3-948B-1728B52AA6E4}">
+                <adec:decorative xmlns:adec="http://schemas.microsoft.com/office/drawing/2017/decorative" val="1"/>
+              </a:ext>
+            </a:extLst>
+          </p:cNvPr>
+          <p:cNvSpPr>
+            <a:spLocks noGrp="1" noRot="1" noChangeAspect="1" noMove="1" noResize="1" noEditPoints="1" noAdjustHandles="1" noChangeArrowheads="1" noChangeShapeType="1" noTextEdit="1"/>
+          </p:cNvSpPr>
+          <p:nvPr>
+            <p:extLst>
+              <p:ext uri="{386F3935-93C4-4BCD-93E2-E3B085C9AB24}">
+                <p16:designElem xmlns:p16="http://schemas.microsoft.com/office/powerpoint/2015/main" val="1"/>
+              </p:ext>
+            </p:extLst>
+          </p:nvPr>
+        </p:nvSpPr>
+        <p:spPr>
+          <a:xfrm>
+            <a:off x="0" y="0"/>
+            <a:ext cx="12192000" cy="6858000"/>
+          </a:xfrm>
+          <a:prstGeom prst="rect">
+            <a:avLst/>
+          </a:prstGeom>
+          <a:solidFill>
+            <a:schemeClr val="tx1">
+              <a:lumMod val="65000"/>
+              <a:lumOff val="35000"/>
+            </a:schemeClr>
+          </a:solidFill>
+          <a:ln>
+            <a:noFill/>
+          </a:ln>
+        </p:spPr>
+        <p:style>
+          <a:lnRef idx="2">
+            <a:schemeClr val="accent1">
+              <a:shade val="50000"/>
+            </a:schemeClr>
+          </a:lnRef>
+          <a:fillRef idx="1">
+            <a:schemeClr val="accent1"/>
+          </a:fillRef>
+          <a:effectRef idx="0">
+            <a:schemeClr val="accent1"/>
+          </a:effectRef>
+          <a:fontRef idx="minor">
+            <a:schemeClr val="lt1"/>
+          </a:fontRef>
+        </p:style>
+        <p:txBody>
+          <a:bodyPr rtlCol="0" anchor="ctr"/>
+          <a:lstStyle/>
+          <a:p>
+            <a:pPr algn="ctr"/>
+            <a:endParaRPr lang="en-US"/>
+          </a:p>
+        </p:txBody>
+      </p:sp>
+      <p:sp>
+        <p:nvSpPr>
+          <p:cNvPr id="9" name="Rectangle 8">
+            <a:extLst>
+              <a:ext uri="{FF2B5EF4-FFF2-40B4-BE49-F238E27FC236}">
+                <a16:creationId xmlns:a16="http://schemas.microsoft.com/office/drawing/2014/main" id="{39E183BD-2932-401F-8B53-E247764B376B}"/>
+              </a:ext>
+              <a:ext uri="{C183D7F6-B498-43B3-948B-1728B52AA6E4}">
+                <adec:decorative xmlns:adec="http://schemas.microsoft.com/office/drawing/2017/decorative" val="1"/>
+              </a:ext>
+            </a:extLst>
+          </p:cNvPr>
+          <p:cNvSpPr>
+            <a:spLocks noGrp="1" noRot="1" noChangeAspect="1" noMove="1" noResize="1" noEditPoints="1" noAdjustHandles="1" noChangeArrowheads="1" noChangeShapeType="1" noTextEdit="1"/>
+          </p:cNvSpPr>
+          <p:nvPr>
+            <p:extLst>
+              <p:ext uri="{386F3935-93C4-4BCD-93E2-E3B085C9AB24}">
+                <p16:designElem xmlns:p16="http://schemas.microsoft.com/office/powerpoint/2015/main" val="1"/>
+              </p:ext>
+            </p:extLst>
+          </p:nvPr>
+        </p:nvSpPr>
+        <p:spPr>
+          <a:xfrm>
+            <a:off x="477012" y="480060"/>
+            <a:ext cx="11237976" cy="5897880"/>
+          </a:xfrm>
+          <a:prstGeom prst="rect">
+            <a:avLst/>
+          </a:prstGeom>
+          <a:solidFill>
+            <a:srgbClr val="FFFFFF"/>
+          </a:solidFill>
+          <a:ln>
+            <a:noFill/>
+          </a:ln>
+        </p:spPr>
+        <p:style>
+          <a:lnRef idx="2">
+            <a:schemeClr val="accent1">
+              <a:shade val="50000"/>
+            </a:schemeClr>
+          </a:lnRef>
+          <a:fillRef idx="1">
+            <a:schemeClr val="accent1"/>
+          </a:fillRef>
+          <a:effectRef idx="0">
+            <a:schemeClr val="accent1"/>
+          </a:effectRef>
+          <a:fontRef idx="minor">
+            <a:schemeClr val="lt1"/>
+          </a:fontRef>
+        </p:style>
+        <p:txBody>
+          <a:bodyPr rtlCol="0" anchor="ctr"/>
+          <a:lstStyle/>
+          <a:p>
+            <a:pPr algn="ctr"/>
+            <a:endParaRPr lang="en-US"/>
+          </a:p>
+        </p:txBody>
+      </p:sp>
+      <p:pic>
+        <p:nvPicPr>
+          <p:cNvPr id="2" name="Picture 2">
+            <a:extLst>
+              <a:ext uri="{FF2B5EF4-FFF2-40B4-BE49-F238E27FC236}">
+                <a16:creationId xmlns:a16="http://schemas.microsoft.com/office/drawing/2014/main" id="{89DF4552-1850-7123-2602-14E372425C5E}"/>
+              </a:ext>
+            </a:extLst>
+          </p:cNvPr>
+          <p:cNvPicPr>
+            <a:picLocks noChangeAspect="1" noChangeArrowheads="1"/>
+          </p:cNvPicPr>
+          <p:nvPr/>
+        </p:nvPicPr>
+        <p:blipFill>
+          <a:blip r:embed="rId2">
+            <a:extLst>
+              <a:ext uri="{28A0092B-C50C-407E-A947-70E740481C1C}">
+                <a14:useLocalDpi xmlns:a14="http://schemas.microsoft.com/office/drawing/2010/main" val="0"/>
+              </a:ext>
+            </a:extLst>
+          </a:blip>
+          <a:stretch>
+            <a:fillRect/>
+          </a:stretch>
+        </p:blipFill>
+        <p:spPr bwMode="auto">
+          <a:xfrm>
+            <a:off x="802335" y="2436440"/>
+            <a:ext cx="10587330" cy="1985121"/>
+          </a:xfrm>
+          <a:prstGeom prst="rect">
+            <a:avLst/>
+          </a:prstGeom>
+          <a:noFill/>
+          <a:extLst>
+            <a:ext uri="{909E8E84-426E-40DD-AFC4-6F175D3DCCD1}">
+              <a14:hiddenFill xmlns:a14="http://schemas.microsoft.com/office/drawing/2010/main">
+                <a:solidFill>
+                  <a:srgbClr val="FFFFFF"/>
+                </a:solidFill>
+              </a14:hiddenFill>
+            </a:ext>
+          </a:extLst>
+        </p:spPr>
+      </p:pic>
+    </p:spTree>
+    <p:extLst>
+      <p:ext uri="{BB962C8B-B14F-4D97-AF65-F5344CB8AC3E}">
+        <p14:creationId xmlns:p14="http://schemas.microsoft.com/office/powerpoint/2010/main" val="2097083421"/>
+      </p:ext>
+    </p:extLst>
+  </p:cSld>
+  <p:clrMapOvr>
+    <a:masterClrMapping/>
+  </p:clrMapOvr>
+</p:sld>
+</file>
+
+<file path=ppt/slides/slide64.xml><?xml version="1.0" encoding="utf-8"?>
+<p:sld xmlns:a="http://schemas.openxmlformats.org/drawingml/2006/main" xmlns:r="http://schemas.openxmlformats.org/officeDocument/2006/relationships" xmlns:p="http://schemas.openxmlformats.org/presentationml/2006/main">
+  <p:cSld>
+    <p:spTree>
+      <p:nvGrpSpPr>
+        <p:cNvPr id="1" name=""/>
+        <p:cNvGrpSpPr/>
+        <p:nvPr/>
+      </p:nvGrpSpPr>
+      <p:grpSpPr>
+        <a:xfrm>
+          <a:off x="0" y="0"/>
+          <a:ext cx="0" cy="0"/>
+          <a:chOff x="0" y="0"/>
+          <a:chExt cx="0" cy="0"/>
+        </a:xfrm>
+      </p:grpSpPr>
+      <p:sp>
+        <p:nvSpPr>
+          <p:cNvPr id="2" name="Title 1">
+            <a:extLst>
+              <a:ext uri="{FF2B5EF4-FFF2-40B4-BE49-F238E27FC236}">
+                <a16:creationId xmlns:a16="http://schemas.microsoft.com/office/drawing/2014/main" id="{D596AE00-F8B4-69B9-C643-7B5311FB3154}"/>
+              </a:ext>
+            </a:extLst>
+          </p:cNvPr>
+          <p:cNvSpPr>
+            <a:spLocks noGrp="1"/>
+          </p:cNvSpPr>
+          <p:nvPr>
+            <p:ph type="title"/>
+          </p:nvPr>
+        </p:nvSpPr>
+        <p:spPr/>
+        <p:txBody>
+          <a:bodyPr/>
+          <a:lstStyle/>
+          <a:p>
+            <a:r>
+              <a:rPr lang="en-US" dirty="0"/>
+              <a:t>How can we use it? /</a:t>
+            </a:r>
+            <a:br>
+              <a:rPr lang="en-US" dirty="0"/>
+            </a:br>
+            <a:r>
+              <a:rPr lang="en-US" dirty="0"/>
+              <a:t>Why should we care?</a:t>
+            </a:r>
+          </a:p>
+        </p:txBody>
+      </p:sp>
+      <p:sp>
+        <p:nvSpPr>
+          <p:cNvPr id="3" name="Content Placeholder 2">
+            <a:extLst>
+              <a:ext uri="{FF2B5EF4-FFF2-40B4-BE49-F238E27FC236}">
+                <a16:creationId xmlns:a16="http://schemas.microsoft.com/office/drawing/2014/main" id="{24FFD176-FC2D-DED5-57AE-DC8593F090BD}"/>
+              </a:ext>
+            </a:extLst>
+          </p:cNvPr>
+          <p:cNvSpPr>
+            <a:spLocks noGrp="1"/>
+          </p:cNvSpPr>
+          <p:nvPr>
+            <p:ph idx="1"/>
+          </p:nvPr>
+        </p:nvSpPr>
+        <p:spPr/>
+        <p:txBody>
+          <a:bodyPr/>
+          <a:lstStyle/>
+          <a:p>
+            <a:r>
+              <a:rPr lang="en-US" dirty="0"/>
+              <a:t>There are two general uses for word embeddings:</a:t>
+            </a:r>
+          </a:p>
+          <a:p>
+            <a:pPr lvl="1"/>
+            <a:r>
+              <a:rPr lang="en-US" dirty="0"/>
+              <a:t>Use the (variation in the) position of words in relation to each other to make inferences about meaning, ideology, biases, etc. (i.e., unsupervised learning)</a:t>
+            </a:r>
+          </a:p>
+          <a:p>
+            <a:pPr lvl="1"/>
+            <a:r>
+              <a:rPr lang="en-US" dirty="0"/>
+              <a:t>Use pre-trained word embeddings to predict categories in text (i.e., supervised learning)</a:t>
+            </a:r>
+          </a:p>
+          <a:p>
+            <a:pPr lvl="1"/>
+            <a:endParaRPr lang="en-US" dirty="0"/>
+          </a:p>
+          <a:p>
+            <a:r>
+              <a:rPr lang="en-US" dirty="0">
+                <a:highlight>
+                  <a:srgbClr val="FFFF00"/>
+                </a:highlight>
+              </a:rPr>
+              <a:t>But what if we could get EVEN BETTER representations?</a:t>
+            </a:r>
+          </a:p>
+        </p:txBody>
+      </p:sp>
+    </p:spTree>
+    <p:extLst>
+      <p:ext uri="{BB962C8B-B14F-4D97-AF65-F5344CB8AC3E}">
+        <p14:creationId xmlns:p14="http://schemas.microsoft.com/office/powerpoint/2010/main" val="802978037"/>
       </p:ext>
     </p:extLst>
   </p:cSld>
